--- a/Day3/3-paev-andmetarkus-esitlus.pptx
+++ b/Day3/3-paev-andmetarkus-esitlus.pptx
@@ -5,50 +5,53 @@
     <p:sldMasterId id="2147483648" r:id="rId4"/>
   </p:sldMasterIdLst>
   <p:notesMasterIdLst>
-    <p:notesMasterId r:id="rId26"/>
+    <p:notesMasterId r:id="rId27"/>
   </p:notesMasterIdLst>
   <p:handoutMasterIdLst>
-    <p:handoutMasterId r:id="rId27"/>
+    <p:handoutMasterId r:id="rId28"/>
   </p:handoutMasterIdLst>
   <p:sldIdLst>
     <p:sldId id="417" r:id="rId5"/>
     <p:sldId id="457" r:id="rId6"/>
     <p:sldId id="447" r:id="rId7"/>
-    <p:sldId id="448" r:id="rId8"/>
-    <p:sldId id="449" r:id="rId9"/>
-    <p:sldId id="579" r:id="rId10"/>
-    <p:sldId id="450" r:id="rId11"/>
-    <p:sldId id="603" r:id="rId12"/>
-    <p:sldId id="638" r:id="rId13"/>
-    <p:sldId id="639" r:id="rId14"/>
-    <p:sldId id="640" r:id="rId15"/>
-    <p:sldId id="484" r:id="rId16"/>
-    <p:sldId id="635" r:id="rId17"/>
-    <p:sldId id="580" r:id="rId18"/>
-    <p:sldId id="588" r:id="rId19"/>
-    <p:sldId id="460" r:id="rId20"/>
-    <p:sldId id="461" r:id="rId21"/>
-    <p:sldId id="581" r:id="rId22"/>
-    <p:sldId id="503" r:id="rId23"/>
-    <p:sldId id="480" r:id="rId24"/>
-    <p:sldId id="604" r:id="rId25"/>
+    <p:sldId id="641" r:id="rId8"/>
+    <p:sldId id="448" r:id="rId9"/>
+    <p:sldId id="449" r:id="rId10"/>
+    <p:sldId id="579" r:id="rId11"/>
+    <p:sldId id="450" r:id="rId12"/>
+    <p:sldId id="603" r:id="rId13"/>
+    <p:sldId id="638" r:id="rId14"/>
+    <p:sldId id="639" r:id="rId15"/>
+    <p:sldId id="640" r:id="rId16"/>
+    <p:sldId id="484" r:id="rId17"/>
+    <p:sldId id="635" r:id="rId18"/>
+    <p:sldId id="580" r:id="rId19"/>
+    <p:sldId id="588" r:id="rId20"/>
+    <p:sldId id="460" r:id="rId21"/>
+    <p:sldId id="461" r:id="rId22"/>
+    <p:sldId id="581" r:id="rId23"/>
+    <p:sldId id="503" r:id="rId24"/>
+    <p:sldId id="480" r:id="rId25"/>
+    <p:sldId id="604" r:id="rId26"/>
   </p:sldIdLst>
   <p:sldSz cx="12192000" cy="6858000"/>
   <p:notesSz cx="6858000" cy="9144000"/>
   <p:embeddedFontLst>
     <p:embeddedFont>
       <p:font typeface="Inter" panose="020B0604020202020204" charset="0"/>
-      <p:regular r:id="rId28"/>
-      <p:bold r:id="rId29"/>
+      <p:regular r:id="rId29"/>
+      <p:bold r:id="rId30"/>
+      <p:italic r:id="rId31"/>
+      <p:boldItalic r:id="rId32"/>
     </p:embeddedFont>
     <p:embeddedFont>
       <p:font typeface="Inter Bold" panose="020B0604020202020204" charset="0"/>
-      <p:bold r:id="rId30"/>
+      <p:bold r:id="rId33"/>
     </p:embeddedFont>
     <p:embeddedFont>
       <p:font typeface="Poppins SemiBold" panose="00000700000000000000" pitchFamily="2" charset="0"/>
-      <p:bold r:id="rId31"/>
-      <p:boldItalic r:id="rId32"/>
+      <p:bold r:id="rId34"/>
+      <p:boldItalic r:id="rId35"/>
     </p:embeddedFont>
   </p:embeddedFontLst>
   <p:defaultTextStyle>
@@ -160,11 +163,7 @@
 <file path=ppt/revisionInfo.xml><?xml version="1.0" encoding="utf-8"?>
 <p1510:revInfo xmlns:a="http://schemas.openxmlformats.org/drawingml/2006/main" xmlns:r="http://schemas.openxmlformats.org/officeDocument/2006/relationships" xmlns:p1510="http://schemas.microsoft.com/office/powerpoint/2015/10/main">
   <p1510:revLst>
-    <p1510:client id="{0072FE40-6ED8-484D-B3BF-2DC3C51420EA}" v="23" dt="2025-08-26T16:15:46.370"/>
-    <p1510:client id="{19C7C3EA-198D-3679-5220-7E0DE865FF5E}" v="111" dt="2025-08-26T15:56:24.840"/>
-    <p1510:client id="{387E47BA-0044-4059-87A0-7CB7C94BEF70}" v="5" dt="2025-08-27T13:26:29.183"/>
-    <p1510:client id="{3FDD2B3C-B068-2607-9D73-F6620F82C026}" v="156" dt="2025-08-26T16:07:37.221"/>
-    <p1510:client id="{C65C1195-2E73-5E4C-4A7C-AFB4C4A5B5A9}" v="79" dt="2025-08-26T15:37:30.809"/>
+    <p1510:client id="{42264095-0336-4BCF-B0CD-C5AE405565C1}" v="3" dt="2026-03-31T14:38:11.727"/>
   </p1510:revLst>
 </p1510:revInfo>
 </file>
@@ -172,124 +171,56 @@
 <file path=ppt/changesInfos/changesInfo1.xml><?xml version="1.0" encoding="utf-8"?>
 <pc:chgInfo xmlns:a="http://schemas.openxmlformats.org/drawingml/2006/main" xmlns:r="http://schemas.openxmlformats.org/officeDocument/2006/relationships" xmlns:ac="http://schemas.microsoft.com/office/drawing/2013/main/command" xmlns:pc="http://schemas.microsoft.com/office/powerpoint/2013/main/command">
   <pc:docChgLst>
-    <pc:chgData name="Virve Räni" userId="161a7437-7ef4-49ec-91bf-54882f313dfe" providerId="ADAL" clId="{387E47BA-0044-4059-87A0-7CB7C94BEF70}"/>
-    <pc:docChg chg="modSld sldOrd">
-      <pc:chgData name="Virve Räni" userId="161a7437-7ef4-49ec-91bf-54882f313dfe" providerId="ADAL" clId="{387E47BA-0044-4059-87A0-7CB7C94BEF70}" dt="2025-08-27T13:26:29.181" v="46" actId="164"/>
+    <pc:chgData name="Virve Räni" userId="161a7437-7ef4-49ec-91bf-54882f313dfe" providerId="ADAL" clId="{6D754EED-65AA-4A21-B175-6769012CF487}"/>
+    <pc:docChg chg="custSel addSld modSld sldOrd">
+      <pc:chgData name="Virve Räni" userId="161a7437-7ef4-49ec-91bf-54882f313dfe" providerId="ADAL" clId="{6D754EED-65AA-4A21-B175-6769012CF487}" dt="2026-03-31T14:38:11.727" v="542" actId="20577"/>
       <pc:docMkLst>
         <pc:docMk/>
       </pc:docMkLst>
-      <pc:sldChg chg="modSp mod">
-        <pc:chgData name="Virve Räni" userId="161a7437-7ef4-49ec-91bf-54882f313dfe" providerId="ADAL" clId="{387E47BA-0044-4059-87A0-7CB7C94BEF70}" dt="2025-08-27T10:06:26.957" v="40" actId="20577"/>
+      <pc:sldChg chg="ord">
+        <pc:chgData name="Virve Räni" userId="161a7437-7ef4-49ec-91bf-54882f313dfe" providerId="ADAL" clId="{6D754EED-65AA-4A21-B175-6769012CF487}" dt="2026-03-31T14:37:40.519" v="539"/>
         <pc:sldMkLst>
           <pc:docMk/>
-          <pc:sldMk cId="3693905438" sldId="457"/>
+          <pc:sldMk cId="2761534892" sldId="447"/>
         </pc:sldMkLst>
-        <pc:graphicFrameChg chg="mod modGraphic">
-          <ac:chgData name="Virve Räni" userId="161a7437-7ef4-49ec-91bf-54882f313dfe" providerId="ADAL" clId="{387E47BA-0044-4059-87A0-7CB7C94BEF70}" dt="2025-08-27T10:06:26.957" v="40" actId="20577"/>
-          <ac:graphicFrameMkLst>
-            <pc:docMk/>
-            <pc:sldMk cId="3693905438" sldId="457"/>
-            <ac:graphicFrameMk id="5" creationId="{62F3D34C-2699-76DE-4C1A-F379ABDEE53E}"/>
-          </ac:graphicFrameMkLst>
-        </pc:graphicFrameChg>
       </pc:sldChg>
-      <pc:sldChg chg="ord">
-        <pc:chgData name="Virve Räni" userId="161a7437-7ef4-49ec-91bf-54882f313dfe" providerId="ADAL" clId="{387E47BA-0044-4059-87A0-7CB7C94BEF70}" dt="2025-08-27T08:37:24.143" v="5"/>
+      <pc:sldChg chg="modSp modAnim">
+        <pc:chgData name="Virve Räni" userId="161a7437-7ef4-49ec-91bf-54882f313dfe" providerId="ADAL" clId="{6D754EED-65AA-4A21-B175-6769012CF487}" dt="2026-03-31T14:38:11.727" v="542" actId="20577"/>
         <pc:sldMkLst>
           <pc:docMk/>
-          <pc:sldMk cId="128759722" sldId="460"/>
+          <pc:sldMk cId="2033048184" sldId="449"/>
         </pc:sldMkLst>
+        <pc:spChg chg="mod">
+          <ac:chgData name="Virve Räni" userId="161a7437-7ef4-49ec-91bf-54882f313dfe" providerId="ADAL" clId="{6D754EED-65AA-4A21-B175-6769012CF487}" dt="2026-03-31T14:38:11.727" v="542" actId="20577"/>
+          <ac:spMkLst>
+            <pc:docMk/>
+            <pc:sldMk cId="2033048184" sldId="449"/>
+            <ac:spMk id="3" creationId="{5724D9C5-3791-BF32-C6DA-2B258420122F}"/>
+          </ac:spMkLst>
+        </pc:spChg>
       </pc:sldChg>
-      <pc:sldChg chg="ord">
-        <pc:chgData name="Virve Räni" userId="161a7437-7ef4-49ec-91bf-54882f313dfe" providerId="ADAL" clId="{387E47BA-0044-4059-87A0-7CB7C94BEF70}" dt="2025-08-27T08:37:24.143" v="5"/>
+      <pc:sldChg chg="modSp new mod">
+        <pc:chgData name="Virve Räni" userId="161a7437-7ef4-49ec-91bf-54882f313dfe" providerId="ADAL" clId="{6D754EED-65AA-4A21-B175-6769012CF487}" dt="2026-03-31T14:34:39.244" v="537" actId="20577"/>
         <pc:sldMkLst>
           <pc:docMk/>
-          <pc:sldMk cId="3558728410" sldId="461"/>
+          <pc:sldMk cId="2411427698" sldId="641"/>
         </pc:sldMkLst>
-      </pc:sldChg>
-      <pc:sldChg chg="ord">
-        <pc:chgData name="Virve Räni" userId="161a7437-7ef4-49ec-91bf-54882f313dfe" providerId="ADAL" clId="{387E47BA-0044-4059-87A0-7CB7C94BEF70}" dt="2025-08-27T07:42:18.893" v="3"/>
-        <pc:sldMkLst>
-          <pc:docMk/>
-          <pc:sldMk cId="1426166856" sldId="480"/>
-        </pc:sldMkLst>
-      </pc:sldChg>
-      <pc:sldChg chg="ord">
-        <pc:chgData name="Virve Räni" userId="161a7437-7ef4-49ec-91bf-54882f313dfe" providerId="ADAL" clId="{387E47BA-0044-4059-87A0-7CB7C94BEF70}" dt="2025-08-27T07:42:18.893" v="3"/>
-        <pc:sldMkLst>
-          <pc:docMk/>
-          <pc:sldMk cId="1920893319" sldId="503"/>
-        </pc:sldMkLst>
-      </pc:sldChg>
-      <pc:sldChg chg="ord">
-        <pc:chgData name="Virve Räni" userId="161a7437-7ef4-49ec-91bf-54882f313dfe" providerId="ADAL" clId="{387E47BA-0044-4059-87A0-7CB7C94BEF70}" dt="2025-08-27T07:42:14.424" v="1"/>
-        <pc:sldMkLst>
-          <pc:docMk/>
-          <pc:sldMk cId="2130150789" sldId="588"/>
-        </pc:sldMkLst>
-      </pc:sldChg>
-      <pc:sldChg chg="addSp modSp mod ord">
-        <pc:chgData name="Virve Räni" userId="161a7437-7ef4-49ec-91bf-54882f313dfe" providerId="ADAL" clId="{387E47BA-0044-4059-87A0-7CB7C94BEF70}" dt="2025-08-27T13:26:29.181" v="46" actId="164"/>
-        <pc:sldMkLst>
-          <pc:docMk/>
-          <pc:sldMk cId="3309601003" sldId="604"/>
-        </pc:sldMkLst>
-        <pc:spChg chg="mod ord">
-          <ac:chgData name="Virve Räni" userId="161a7437-7ef4-49ec-91bf-54882f313dfe" providerId="ADAL" clId="{387E47BA-0044-4059-87A0-7CB7C94BEF70}" dt="2025-08-27T13:26:29.181" v="46" actId="164"/>
+        <pc:spChg chg="mod">
+          <ac:chgData name="Virve Räni" userId="161a7437-7ef4-49ec-91bf-54882f313dfe" providerId="ADAL" clId="{6D754EED-65AA-4A21-B175-6769012CF487}" dt="2026-03-31T14:26:20.550" v="79" actId="20577"/>
           <ac:spMkLst>
             <pc:docMk/>
-            <pc:sldMk cId="3309601003" sldId="604"/>
-            <ac:spMk id="4" creationId="{EC938FF6-1A89-CFA2-0A21-F0F5D52BF284}"/>
+            <pc:sldMk cId="2411427698" sldId="641"/>
+            <ac:spMk id="2" creationId="{1524985D-536E-5D52-E9A5-AA1E3944782F}"/>
           </ac:spMkLst>
         </pc:spChg>
         <pc:spChg chg="mod">
-          <ac:chgData name="Virve Räni" userId="161a7437-7ef4-49ec-91bf-54882f313dfe" providerId="ADAL" clId="{387E47BA-0044-4059-87A0-7CB7C94BEF70}" dt="2025-08-27T13:26:14.301" v="44" actId="164"/>
+          <ac:chgData name="Virve Räni" userId="161a7437-7ef4-49ec-91bf-54882f313dfe" providerId="ADAL" clId="{6D754EED-65AA-4A21-B175-6769012CF487}" dt="2026-03-31T14:34:39.244" v="537" actId="20577"/>
           <ac:spMkLst>
             <pc:docMk/>
-            <pc:sldMk cId="3309601003" sldId="604"/>
-            <ac:spMk id="6" creationId="{DAAB000F-3FDF-A298-A857-299EE56275A9}"/>
+            <pc:sldMk cId="2411427698" sldId="641"/>
+            <ac:spMk id="3" creationId="{C53EAF1F-B8FA-F7FE-8F42-5998CE884202}"/>
           </ac:spMkLst>
         </pc:spChg>
-        <pc:spChg chg="mod">
-          <ac:chgData name="Virve Räni" userId="161a7437-7ef4-49ec-91bf-54882f313dfe" providerId="ADAL" clId="{387E47BA-0044-4059-87A0-7CB7C94BEF70}" dt="2025-08-27T13:26:14.301" v="44" actId="164"/>
-          <ac:spMkLst>
-            <pc:docMk/>
-            <pc:sldMk cId="3309601003" sldId="604"/>
-            <ac:spMk id="10" creationId="{F8C684C0-8797-503E-DAD1-EC900E96B8A7}"/>
-          </ac:spMkLst>
-        </pc:spChg>
-        <pc:grpChg chg="add mod">
-          <ac:chgData name="Virve Räni" userId="161a7437-7ef4-49ec-91bf-54882f313dfe" providerId="ADAL" clId="{387E47BA-0044-4059-87A0-7CB7C94BEF70}" dt="2025-08-27T13:26:29.181" v="46" actId="164"/>
-          <ac:grpSpMkLst>
-            <pc:docMk/>
-            <pc:sldMk cId="3309601003" sldId="604"/>
-            <ac:grpSpMk id="2" creationId="{2FFF91DC-E0E0-6460-0FD6-993B52FEEF9B}"/>
-          </ac:grpSpMkLst>
-        </pc:grpChg>
-        <pc:grpChg chg="add mod">
-          <ac:chgData name="Virve Räni" userId="161a7437-7ef4-49ec-91bf-54882f313dfe" providerId="ADAL" clId="{387E47BA-0044-4059-87A0-7CB7C94BEF70}" dt="2025-08-27T13:26:14.301" v="44" actId="164"/>
-          <ac:grpSpMkLst>
-            <pc:docMk/>
-            <pc:sldMk cId="3309601003" sldId="604"/>
-            <ac:grpSpMk id="5" creationId="{3F2CF34D-D493-A067-9573-60369720B3A1}"/>
-          </ac:grpSpMkLst>
-        </pc:grpChg>
-        <pc:grpChg chg="add mod">
-          <ac:chgData name="Virve Räni" userId="161a7437-7ef4-49ec-91bf-54882f313dfe" providerId="ADAL" clId="{387E47BA-0044-4059-87A0-7CB7C94BEF70}" dt="2025-08-27T13:26:29.181" v="46" actId="164"/>
-          <ac:grpSpMkLst>
-            <pc:docMk/>
-            <pc:sldMk cId="3309601003" sldId="604"/>
-            <ac:grpSpMk id="9" creationId="{5C40542A-C4B6-64AE-9BC2-3A8D5B54DA5B}"/>
-          </ac:grpSpMkLst>
-        </pc:grpChg>
-        <pc:picChg chg="mod">
-          <ac:chgData name="Virve Räni" userId="161a7437-7ef4-49ec-91bf-54882f313dfe" providerId="ADAL" clId="{387E47BA-0044-4059-87A0-7CB7C94BEF70}" dt="2025-08-27T13:26:14.301" v="44" actId="164"/>
-          <ac:picMkLst>
-            <pc:docMk/>
-            <pc:sldMk cId="3309601003" sldId="604"/>
-            <ac:picMk id="3" creationId="{5710E79F-52E9-74F5-8969-7A5AEF53A382}"/>
-          </ac:picMkLst>
-        </pc:picChg>
       </pc:sldChg>
     </pc:docChg>
   </pc:docChgLst>
@@ -390,7 +321,7 @@
           <a:p>
             <a:fld id="{F9D2AD6E-DEDD-49A0-A4BE-7A081A9112DA}" type="datetimeFigureOut">
               <a:rPr lang="en-US" smtClean="0"/>
-              <a:t>8/27/2025</a:t>
+              <a:t>3/31/2026</a:t>
             </a:fld>
             <a:endParaRPr lang="en-US"/>
           </a:p>
@@ -566,7 +497,7 @@
           </a:lstStyle>
           <a:p>
             <a:fld id="{2AF9C1A6-4321-41FA-B001-4140F0E2457F}" type="datetimeFigureOut">
-              <a:t>27.08.2025</a:t>
+              <a:t>31.03.2026</a:t>
             </a:fld>
             <a:endParaRPr lang="en-US"/>
           </a:p>
@@ -986,7 +917,7 @@
           <a:p>
             <a:fld id="{46699514-027B-49BD-8B49-5054CA40ECF4}" type="slidenum">
               <a:rPr lang="en-US"/>
-              <a:t>7</a:t>
+              <a:t>8</a:t>
             </a:fld>
             <a:endParaRPr lang="en-US"/>
           </a:p>
@@ -1097,7 +1028,7 @@
           <a:p>
             <a:fld id="{46699514-027B-49BD-8B49-5054CA40ECF4}" type="slidenum">
               <a:rPr lang="en-US"/>
-              <a:t>15</a:t>
+              <a:t>16</a:t>
             </a:fld>
             <a:endParaRPr lang="en-US"/>
           </a:p>
@@ -1184,7 +1115,7 @@
           <a:p>
             <a:fld id="{46699514-027B-49BD-8B49-5054CA40ECF4}" type="slidenum">
               <a:rPr lang="en-US"/>
-              <a:t>19</a:t>
+              <a:t>20</a:t>
             </a:fld>
             <a:endParaRPr lang="en-US"/>
           </a:p>
@@ -1243,10 +1174,10 @@
           <p:nvPr userDrawn="1"/>
         </p:nvPicPr>
         <p:blipFill>
-          <a:blip r:embed="rId2">
+          <a:blip>
             <a:extLst>
               <a:ext uri="{96DAC541-7B7A-43D3-8B79-37D633B846F1}">
-                <asvg:svgBlip xmlns:asvg="http://schemas.microsoft.com/office/drawing/2016/SVG/main" r:embed="rId3"/>
+                <asvg:svgBlip xmlns:asvg="http://schemas.microsoft.com/office/drawing/2016/SVG/main" r:embed="rId2"/>
               </a:ext>
             </a:extLst>
           </a:blip>
@@ -10804,10 +10735,10 @@
             <a:ext cx="810000" cy="320400"/>
           </a:xfrm>
           <a:blipFill>
-            <a:blip r:embed="rId2">
+            <a:blip>
               <a:extLst>
                 <a:ext uri="{96DAC541-7B7A-43D3-8B79-37D633B846F1}">
-                  <asvg:svgBlip xmlns:asvg="http://schemas.microsoft.com/office/drawing/2016/SVG/main" r:embed="rId3"/>
+                  <asvg:svgBlip xmlns:asvg="http://schemas.microsoft.com/office/drawing/2016/SVG/main" r:embed="rId2"/>
                 </a:ext>
               </a:extLst>
             </a:blip>
@@ -12086,10 +12017,10 @@
             <a:ext cx="810000" cy="320400"/>
           </a:xfrm>
           <a:blipFill>
-            <a:blip r:embed="rId2">
+            <a:blip>
               <a:extLst>
                 <a:ext uri="{96DAC541-7B7A-43D3-8B79-37D633B846F1}">
-                  <asvg:svgBlip xmlns:asvg="http://schemas.microsoft.com/office/drawing/2016/SVG/main" r:embed="rId3"/>
+                  <asvg:svgBlip xmlns:asvg="http://schemas.microsoft.com/office/drawing/2016/SVG/main" r:embed="rId2"/>
                 </a:ext>
               </a:extLst>
             </a:blip>
@@ -12330,7 +12261,7 @@
           <a:p>
             <a:fld id="{DE840A40-73C8-4048-8140-49F5D65BB431}" type="datetimeFigureOut">
               <a:rPr lang="et-EE" smtClean="0"/>
-              <a:t>27.08.2025</a:t>
+              <a:t>31.03.2026</a:t>
             </a:fld>
             <a:endParaRPr lang="et-EE"/>
           </a:p>
@@ -12443,10 +12374,10 @@
           <p:nvPr userDrawn="1"/>
         </p:nvPicPr>
         <p:blipFill>
-          <a:blip r:embed="rId2">
+          <a:blip>
             <a:extLst>
               <a:ext uri="{96DAC541-7B7A-43D3-8B79-37D633B846F1}">
-                <asvg:svgBlip xmlns:asvg="http://schemas.microsoft.com/office/drawing/2016/SVG/main" r:embed="rId3"/>
+                <asvg:svgBlip xmlns:asvg="http://schemas.microsoft.com/office/drawing/2016/SVG/main" r:embed="rId2"/>
               </a:ext>
             </a:extLst>
           </a:blip>
@@ -19425,10 +19356,10 @@
             <a:ext cx="2302064" cy="927536"/>
           </a:xfrm>
           <a:blipFill>
-            <a:blip r:embed="rId2">
+            <a:blip>
               <a:extLst>
                 <a:ext uri="{96DAC541-7B7A-43D3-8B79-37D633B846F1}">
-                  <asvg:svgBlip xmlns:asvg="http://schemas.microsoft.com/office/drawing/2016/SVG/main" r:embed="rId3"/>
+                  <asvg:svgBlip xmlns:asvg="http://schemas.microsoft.com/office/drawing/2016/SVG/main" r:embed="rId2"/>
                 </a:ext>
               </a:extLst>
             </a:blip>
@@ -19611,10 +19542,10 @@
           <p:nvPr userDrawn="1"/>
         </p:nvPicPr>
         <p:blipFill>
-          <a:blip r:embed="rId2">
+          <a:blip>
             <a:extLst>
               <a:ext uri="{96DAC541-7B7A-43D3-8B79-37D633B846F1}">
-                <asvg:svgBlip xmlns:asvg="http://schemas.microsoft.com/office/drawing/2016/SVG/main" r:embed="rId3"/>
+                <asvg:svgBlip xmlns:asvg="http://schemas.microsoft.com/office/drawing/2016/SVG/main" r:embed="rId2"/>
               </a:ext>
             </a:extLst>
           </a:blip>
@@ -20345,10 +20276,10 @@
           <p:nvPr userDrawn="1"/>
         </p:nvPicPr>
         <p:blipFill>
-          <a:blip r:embed="rId2">
+          <a:blip>
             <a:extLst>
               <a:ext uri="{96DAC541-7B7A-43D3-8B79-37D633B846F1}">
-                <asvg:svgBlip xmlns:asvg="http://schemas.microsoft.com/office/drawing/2016/SVG/main" r:embed="rId3"/>
+                <asvg:svgBlip xmlns:asvg="http://schemas.microsoft.com/office/drawing/2016/SVG/main" r:embed="rId2"/>
               </a:ext>
             </a:extLst>
           </a:blip>
@@ -21134,10 +21065,10 @@
             <a:ext cx="810000" cy="320400"/>
           </a:xfrm>
           <a:blipFill>
-            <a:blip r:embed="rId2">
+            <a:blip>
               <a:extLst>
                 <a:ext uri="{96DAC541-7B7A-43D3-8B79-37D633B846F1}">
-                  <asvg:svgBlip xmlns:asvg="http://schemas.microsoft.com/office/drawing/2016/SVG/main" r:embed="rId3"/>
+                  <asvg:svgBlip xmlns:asvg="http://schemas.microsoft.com/office/drawing/2016/SVG/main" r:embed="rId2"/>
                 </a:ext>
               </a:extLst>
             </a:blip>
@@ -24442,6 +24373,257 @@
   <p:cSld>
     <p:spTree>
       <p:nvGrpSpPr>
+        <p:cNvPr id="1" name=""/>
+        <p:cNvGrpSpPr/>
+        <p:nvPr/>
+      </p:nvGrpSpPr>
+      <p:grpSpPr>
+        <a:xfrm>
+          <a:off x="0" y="0"/>
+          <a:ext cx="0" cy="0"/>
+          <a:chOff x="0" y="0"/>
+          <a:chExt cx="0" cy="0"/>
+        </a:xfrm>
+      </p:grpSpPr>
+      <p:sp>
+        <p:nvSpPr>
+          <p:cNvPr id="2" name="Title 1">
+            <a:extLst>
+              <a:ext uri="{FF2B5EF4-FFF2-40B4-BE49-F238E27FC236}">
+                <a16:creationId xmlns:a16="http://schemas.microsoft.com/office/drawing/2014/main" id="{6CC70693-807C-0582-E2F8-D70C2E33A16B}"/>
+              </a:ext>
+            </a:extLst>
+          </p:cNvPr>
+          <p:cNvSpPr>
+            <a:spLocks noGrp="1"/>
+          </p:cNvSpPr>
+          <p:nvPr>
+            <p:ph type="ctrTitle"/>
+          </p:nvPr>
+        </p:nvSpPr>
+        <p:spPr/>
+        <p:txBody>
+          <a:bodyPr/>
+          <a:lstStyle/>
+          <a:p>
+            <a:r>
+              <a:rPr lang="en-US"/>
+              <a:t>Kumb </a:t>
+            </a:r>
+            <a:r>
+              <a:rPr lang="en-US" err="1"/>
+              <a:t>visuaal</a:t>
+            </a:r>
+            <a:r>
+              <a:rPr lang="en-US"/>
+              <a:t> on  </a:t>
+            </a:r>
+            <a:r>
+              <a:rPr lang="en-US" err="1"/>
+              <a:t>parem</a:t>
+            </a:r>
+            <a:r>
+              <a:rPr lang="en-US"/>
+              <a:t> – </a:t>
+            </a:r>
+            <a:r>
+              <a:rPr lang="en-US" err="1"/>
+              <a:t>miks</a:t>
+            </a:r>
+            <a:r>
+              <a:rPr lang="en-US"/>
+              <a:t>?</a:t>
+            </a:r>
+          </a:p>
+        </p:txBody>
+      </p:sp>
+      <p:sp>
+        <p:nvSpPr>
+          <p:cNvPr id="3" name="Content Placeholder 2">
+            <a:extLst>
+              <a:ext uri="{FF2B5EF4-FFF2-40B4-BE49-F238E27FC236}">
+                <a16:creationId xmlns:a16="http://schemas.microsoft.com/office/drawing/2014/main" id="{628CD13E-E6C1-F13D-85FB-D41B6EB0BA6C}"/>
+              </a:ext>
+            </a:extLst>
+          </p:cNvPr>
+          <p:cNvSpPr>
+            <a:spLocks noGrp="1"/>
+          </p:cNvSpPr>
+          <p:nvPr>
+            <p:ph sz="quarter" idx="10"/>
+          </p:nvPr>
+        </p:nvSpPr>
+        <p:spPr/>
+        <p:txBody>
+          <a:bodyPr/>
+          <a:lstStyle/>
+          <a:p>
+            <a:endParaRPr lang="en-US"/>
+          </a:p>
+        </p:txBody>
+      </p:sp>
+      <p:sp>
+        <p:nvSpPr>
+          <p:cNvPr id="4" name="Content Placeholder 3">
+            <a:extLst>
+              <a:ext uri="{FF2B5EF4-FFF2-40B4-BE49-F238E27FC236}">
+                <a16:creationId xmlns:a16="http://schemas.microsoft.com/office/drawing/2014/main" id="{DF34A489-80BB-9D68-E783-307EEB75483F}"/>
+              </a:ext>
+            </a:extLst>
+          </p:cNvPr>
+          <p:cNvSpPr>
+            <a:spLocks noGrp="1"/>
+          </p:cNvSpPr>
+          <p:nvPr>
+            <p:ph sz="quarter" idx="11"/>
+          </p:nvPr>
+        </p:nvSpPr>
+        <p:spPr/>
+        <p:txBody>
+          <a:bodyPr/>
+          <a:lstStyle/>
+          <a:p>
+            <a:endParaRPr lang="en-US"/>
+          </a:p>
+        </p:txBody>
+      </p:sp>
+      <p:pic>
+        <p:nvPicPr>
+          <p:cNvPr id="6" name="Content Placeholder 4" descr="A graph of co2 emissions&#10;&#10;AI-generated content may be incorrect.">
+            <a:extLst>
+              <a:ext uri="{FF2B5EF4-FFF2-40B4-BE49-F238E27FC236}">
+                <a16:creationId xmlns:a16="http://schemas.microsoft.com/office/drawing/2014/main" id="{42F28992-9372-2820-2AA9-A223EC4F3979}"/>
+              </a:ext>
+            </a:extLst>
+          </p:cNvPr>
+          <p:cNvPicPr>
+            <a:picLocks noChangeAspect="1"/>
+          </p:cNvPicPr>
+          <p:nvPr/>
+        </p:nvPicPr>
+        <p:blipFill>
+          <a:blip r:embed="rId2"/>
+          <a:stretch>
+            <a:fillRect/>
+          </a:stretch>
+        </p:blipFill>
+        <p:spPr>
+          <a:xfrm>
+            <a:off x="792279" y="1266546"/>
+            <a:ext cx="5181752" cy="4159478"/>
+          </a:xfrm>
+          <a:prstGeom prst="rect">
+            <a:avLst/>
+          </a:prstGeom>
+        </p:spPr>
+      </p:pic>
+      <p:pic>
+        <p:nvPicPr>
+          <p:cNvPr id="8" name="Content Placeholder 5" descr="A graph with a red bar and gray bars&#10;&#10;AI-generated content may be incorrect.">
+            <a:extLst>
+              <a:ext uri="{FF2B5EF4-FFF2-40B4-BE49-F238E27FC236}">
+                <a16:creationId xmlns:a16="http://schemas.microsoft.com/office/drawing/2014/main" id="{FDC5B212-1535-8D2B-FD2B-6429917814AB}"/>
+              </a:ext>
+            </a:extLst>
+          </p:cNvPr>
+          <p:cNvPicPr>
+            <a:picLocks noChangeAspect="1"/>
+          </p:cNvPicPr>
+          <p:nvPr/>
+        </p:nvPicPr>
+        <p:blipFill>
+          <a:blip r:embed="rId3"/>
+          <a:stretch>
+            <a:fillRect/>
+          </a:stretch>
+        </p:blipFill>
+        <p:spPr>
+          <a:xfrm>
+            <a:off x="6205849" y="1268413"/>
+            <a:ext cx="5371682" cy="4143787"/>
+          </a:xfrm>
+          <a:prstGeom prst="rect">
+            <a:avLst/>
+          </a:prstGeom>
+        </p:spPr>
+      </p:pic>
+      <p:sp>
+        <p:nvSpPr>
+          <p:cNvPr id="5" name="TextBox 4">
+            <a:extLst>
+              <a:ext uri="{FF2B5EF4-FFF2-40B4-BE49-F238E27FC236}">
+                <a16:creationId xmlns:a16="http://schemas.microsoft.com/office/drawing/2014/main" id="{5A9BEFD3-193A-7B44-10AC-572FE16CDF23}"/>
+              </a:ext>
+            </a:extLst>
+          </p:cNvPr>
+          <p:cNvSpPr txBox="1"/>
+          <p:nvPr/>
+        </p:nvSpPr>
+        <p:spPr>
+          <a:xfrm>
+            <a:off x="631795" y="6124716"/>
+            <a:ext cx="8577018" cy="276999"/>
+          </a:xfrm>
+          <a:prstGeom prst="rect">
+            <a:avLst/>
+          </a:prstGeom>
+          <a:noFill/>
+        </p:spPr>
+        <p:txBody>
+          <a:bodyPr rot="0" spcFirstLastPara="0" vertOverflow="overflow" horzOverflow="overflow" vert="horz" wrap="square" lIns="91440" tIns="45720" rIns="91440" bIns="45720" numCol="1" spcCol="0" rtlCol="0" fromWordArt="0" anchor="t" anchorCtr="0" forceAA="0" compatLnSpc="1">
+            <a:prstTxWarp prst="textNoShape">
+              <a:avLst/>
+            </a:prstTxWarp>
+            <a:spAutoFit/>
+          </a:bodyPr>
+          <a:lstStyle/>
+          <a:p>
+            <a:r>
+              <a:rPr lang="en-US" sz="1200">
+                <a:ea typeface="Inter"/>
+              </a:rPr>
+              <a:t>Allikas: </a:t>
+            </a:r>
+            <a:r>
+              <a:rPr lang="en-US" sz="1200">
+                <a:ea typeface="Inter"/>
+                <a:hlinkClick r:id="rId4"/>
+              </a:rPr>
+              <a:t>Rand Owens. </a:t>
+            </a:r>
+            <a:r>
+              <a:rPr lang="en-US" sz="1200">
+                <a:solidFill>
+                  <a:srgbClr val="000000"/>
+                </a:solidFill>
+                <a:hlinkClick r:id="rId4"/>
+              </a:rPr>
+              <a:t>10 Good and Bad Examples of Data Visualization in 2024.</a:t>
+            </a:r>
+            <a:endParaRPr lang="en-US" sz="1200">
+              <a:ea typeface="Inter"/>
+            </a:endParaRPr>
+          </a:p>
+        </p:txBody>
+      </p:sp>
+    </p:spTree>
+    <p:extLst>
+      <p:ext uri="{BB962C8B-B14F-4D97-AF65-F5344CB8AC3E}">
+        <p14:creationId xmlns:p14="http://schemas.microsoft.com/office/powerpoint/2010/main" val="473110062"/>
+      </p:ext>
+    </p:extLst>
+  </p:cSld>
+  <p:clrMapOvr>
+    <a:masterClrMapping/>
+  </p:clrMapOvr>
+</p:sld>
+</file>
+
+<file path=ppt/slides/slide11.xml><?xml version="1.0" encoding="utf-8"?>
+<p:sld xmlns:a="http://schemas.openxmlformats.org/drawingml/2006/main" xmlns:r="http://schemas.openxmlformats.org/officeDocument/2006/relationships" xmlns:p="http://schemas.openxmlformats.org/presentationml/2006/main">
+  <p:cSld>
+    <p:spTree>
+      <p:nvGrpSpPr>
         <p:cNvPr id="1" name="">
           <a:extLst>
             <a:ext uri="{FF2B5EF4-FFF2-40B4-BE49-F238E27FC236}">
@@ -24597,7 +24779,7 @@
 </p:sld>
 </file>
 
-<file path=ppt/slides/slide11.xml><?xml version="1.0" encoding="utf-8"?>
+<file path=ppt/slides/slide12.xml><?xml version="1.0" encoding="utf-8"?>
 <p:sld xmlns:a="http://schemas.openxmlformats.org/drawingml/2006/main" xmlns:r="http://schemas.openxmlformats.org/officeDocument/2006/relationships" xmlns:p="http://schemas.openxmlformats.org/presentationml/2006/main">
   <p:cSld>
     <p:spTree>
@@ -24808,7 +24990,7 @@
 </p:sld>
 </file>
 
-<file path=ppt/slides/slide12.xml><?xml version="1.0" encoding="utf-8"?>
+<file path=ppt/slides/slide13.xml><?xml version="1.0" encoding="utf-8"?>
 <p:sld xmlns:a="http://schemas.openxmlformats.org/drawingml/2006/main" xmlns:r="http://schemas.openxmlformats.org/officeDocument/2006/relationships" xmlns:p="http://schemas.openxmlformats.org/presentationml/2006/main">
   <p:cSld>
     <p:spTree>
@@ -24962,7 +25144,7 @@
 </p:sld>
 </file>
 
-<file path=ppt/slides/slide13.xml><?xml version="1.0" encoding="utf-8"?>
+<file path=ppt/slides/slide14.xml><?xml version="1.0" encoding="utf-8"?>
 <p:sld xmlns:a="http://schemas.openxmlformats.org/drawingml/2006/main" xmlns:r="http://schemas.openxmlformats.org/officeDocument/2006/relationships" xmlns:p="http://schemas.openxmlformats.org/presentationml/2006/main">
   <p:cSld>
     <p:spTree>
@@ -25093,7 +25275,7 @@
 </p:sld>
 </file>
 
-<file path=ppt/slides/slide14.xml><?xml version="1.0" encoding="utf-8"?>
+<file path=ppt/slides/slide15.xml><?xml version="1.0" encoding="utf-8"?>
 <p:sld xmlns:a="http://schemas.openxmlformats.org/drawingml/2006/main" xmlns:r="http://schemas.openxmlformats.org/officeDocument/2006/relationships" xmlns:p="http://schemas.openxmlformats.org/presentationml/2006/main">
   <p:cSld>
     <p:spTree>
@@ -25210,7 +25392,7 @@
 </p:sld>
 </file>
 
-<file path=ppt/slides/slide15.xml><?xml version="1.0" encoding="utf-8"?>
+<file path=ppt/slides/slide16.xml><?xml version="1.0" encoding="utf-8"?>
 <p:sld xmlns:a="http://schemas.openxmlformats.org/drawingml/2006/main" xmlns:r="http://schemas.openxmlformats.org/officeDocument/2006/relationships" xmlns:p="http://schemas.openxmlformats.org/presentationml/2006/main">
   <p:cSld>
     <p:spTree>
@@ -25520,7 +25702,7 @@
 </p:sld>
 </file>
 
-<file path=ppt/slides/slide16.xml><?xml version="1.0" encoding="utf-8"?>
+<file path=ppt/slides/slide17.xml><?xml version="1.0" encoding="utf-8"?>
 <p:sld xmlns:a="http://schemas.openxmlformats.org/drawingml/2006/main" xmlns:r="http://schemas.openxmlformats.org/officeDocument/2006/relationships" xmlns:p="http://schemas.openxmlformats.org/presentationml/2006/main">
   <p:cSld>
     <p:spTree>
@@ -26082,7 +26264,7 @@
 </p:sld>
 </file>
 
-<file path=ppt/slides/slide17.xml><?xml version="1.0" encoding="utf-8"?>
+<file path=ppt/slides/slide18.xml><?xml version="1.0" encoding="utf-8"?>
 <p:sld xmlns:a="http://schemas.openxmlformats.org/drawingml/2006/main" xmlns:r="http://schemas.openxmlformats.org/officeDocument/2006/relationships" xmlns:p="http://schemas.openxmlformats.org/presentationml/2006/main">
   <p:cSld>
     <p:spTree>
@@ -26487,7 +26669,7 @@
 </p:sld>
 </file>
 
-<file path=ppt/slides/slide18.xml><?xml version="1.0" encoding="utf-8"?>
+<file path=ppt/slides/slide19.xml><?xml version="1.0" encoding="utf-8"?>
 <p:sld xmlns:a="http://schemas.openxmlformats.org/drawingml/2006/main" xmlns:r="http://schemas.openxmlformats.org/officeDocument/2006/relationships" xmlns:p="http://schemas.openxmlformats.org/presentationml/2006/main">
   <p:cSld>
     <p:spTree>
@@ -26591,586 +26773,6 @@
     <p:extLst>
       <p:ext uri="{BB962C8B-B14F-4D97-AF65-F5344CB8AC3E}">
         <p14:creationId xmlns:p14="http://schemas.microsoft.com/office/powerpoint/2010/main" val="3731588115"/>
-      </p:ext>
-    </p:extLst>
-  </p:cSld>
-  <p:clrMapOvr>
-    <a:masterClrMapping/>
-  </p:clrMapOvr>
-</p:sld>
-</file>
-
-<file path=ppt/slides/slide19.xml><?xml version="1.0" encoding="utf-8"?>
-<p:sld xmlns:a="http://schemas.openxmlformats.org/drawingml/2006/main" xmlns:r="http://schemas.openxmlformats.org/officeDocument/2006/relationships" xmlns:p="http://schemas.openxmlformats.org/presentationml/2006/main">
-  <p:cSld>
-    <p:spTree>
-      <p:nvGrpSpPr>
-        <p:cNvPr id="1" name="">
-          <a:extLst>
-            <a:ext uri="{FF2B5EF4-FFF2-40B4-BE49-F238E27FC236}">
-              <a16:creationId xmlns:a16="http://schemas.microsoft.com/office/drawing/2014/main" id="{C2769484-4C76-162B-D0A1-45BF448ABC46}"/>
-            </a:ext>
-          </a:extLst>
-        </p:cNvPr>
-        <p:cNvGrpSpPr/>
-        <p:nvPr/>
-      </p:nvGrpSpPr>
-      <p:grpSpPr>
-        <a:xfrm>
-          <a:off x="0" y="0"/>
-          <a:ext cx="0" cy="0"/>
-          <a:chOff x="0" y="0"/>
-          <a:chExt cx="0" cy="0"/>
-        </a:xfrm>
-      </p:grpSpPr>
-      <p:sp>
-        <p:nvSpPr>
-          <p:cNvPr id="2" name="Title 1">
-            <a:extLst>
-              <a:ext uri="{FF2B5EF4-FFF2-40B4-BE49-F238E27FC236}">
-                <a16:creationId xmlns:a16="http://schemas.microsoft.com/office/drawing/2014/main" id="{5BBBDC7B-D396-F1F4-9065-942A05C79CD7}"/>
-              </a:ext>
-            </a:extLst>
-          </p:cNvPr>
-          <p:cNvSpPr>
-            <a:spLocks noGrp="1"/>
-          </p:cNvSpPr>
-          <p:nvPr>
-            <p:ph type="ctrTitle"/>
-          </p:nvPr>
-        </p:nvSpPr>
-        <p:spPr/>
-        <p:txBody>
-          <a:bodyPr/>
-          <a:lstStyle/>
-          <a:p>
-            <a:r>
-              <a:rPr lang="en-US" err="1"/>
-              <a:t>Andmeloo</a:t>
-            </a:r>
-            <a:r>
-              <a:rPr lang="en-US"/>
-              <a:t> </a:t>
-            </a:r>
-            <a:r>
-              <a:rPr lang="en-US" err="1"/>
-              <a:t>jutustamine</a:t>
-            </a:r>
-          </a:p>
-        </p:txBody>
-      </p:sp>
-      <p:sp>
-        <p:nvSpPr>
-          <p:cNvPr id="3" name="Content Placeholder 2">
-            <a:extLst>
-              <a:ext uri="{FF2B5EF4-FFF2-40B4-BE49-F238E27FC236}">
-                <a16:creationId xmlns:a16="http://schemas.microsoft.com/office/drawing/2014/main" id="{0E976C14-59CC-5214-7F12-0F82D85E4D18}"/>
-              </a:ext>
-            </a:extLst>
-          </p:cNvPr>
-          <p:cNvSpPr>
-            <a:spLocks noGrp="1"/>
-          </p:cNvSpPr>
-          <p:nvPr>
-            <p:ph sz="quarter" idx="10"/>
-          </p:nvPr>
-        </p:nvSpPr>
-        <p:spPr/>
-        <p:txBody>
-          <a:bodyPr/>
-          <a:lstStyle/>
-          <a:p>
-            <a:pPr>
-              <a:lnSpc>
-                <a:spcPct val="150000"/>
-              </a:lnSpc>
-            </a:pPr>
-            <a:r>
-              <a:rPr lang="en-US" sz="2400" dirty="0">
-                <a:solidFill>
-                  <a:srgbClr val="000000"/>
-                </a:solidFill>
-                <a:ea typeface="Inter"/>
-              </a:rPr>
-              <a:t>Kui </a:t>
-            </a:r>
-            <a:r>
-              <a:rPr lang="en-US" sz="2400" dirty="0" err="1">
-                <a:solidFill>
-                  <a:srgbClr val="000000"/>
-                </a:solidFill>
-                <a:ea typeface="Inter"/>
-              </a:rPr>
-              <a:t>tahad</a:t>
-            </a:r>
-            <a:r>
-              <a:rPr lang="en-US" sz="2400" dirty="0">
-                <a:solidFill>
-                  <a:srgbClr val="000000"/>
-                </a:solidFill>
-                <a:ea typeface="Inter"/>
-              </a:rPr>
-              <a:t> </a:t>
-            </a:r>
-            <a:r>
-              <a:rPr lang="en-US" sz="2400" dirty="0" err="1">
-                <a:solidFill>
-                  <a:srgbClr val="000000"/>
-                </a:solidFill>
-                <a:ea typeface="Inter"/>
-              </a:rPr>
-              <a:t>edasi</a:t>
-            </a:r>
-            <a:r>
-              <a:rPr lang="en-US" sz="2400" dirty="0">
-                <a:solidFill>
-                  <a:srgbClr val="000000"/>
-                </a:solidFill>
-                <a:ea typeface="Inter"/>
-              </a:rPr>
-              <a:t> </a:t>
-            </a:r>
-            <a:r>
-              <a:rPr lang="en-US" sz="2400" dirty="0" err="1">
-                <a:solidFill>
-                  <a:srgbClr val="000000"/>
-                </a:solidFill>
-                <a:ea typeface="Inter"/>
-              </a:rPr>
-              <a:t>anda</a:t>
-            </a:r>
-            <a:r>
-              <a:rPr lang="en-US" sz="2400" dirty="0">
-                <a:solidFill>
-                  <a:srgbClr val="000000"/>
-                </a:solidFill>
-                <a:ea typeface="Inter"/>
-              </a:rPr>
-              <a:t> </a:t>
-            </a:r>
-            <a:r>
-              <a:rPr lang="en-US" sz="2400" dirty="0" err="1">
-                <a:solidFill>
-                  <a:srgbClr val="000000"/>
-                </a:solidFill>
-                <a:ea typeface="Inter"/>
-              </a:rPr>
-              <a:t>kindla</a:t>
-            </a:r>
-            <a:r>
-              <a:rPr lang="en-US" sz="2400" dirty="0">
-                <a:solidFill>
-                  <a:srgbClr val="000000"/>
-                </a:solidFill>
-                <a:ea typeface="Inter"/>
-              </a:rPr>
-              <a:t> </a:t>
-            </a:r>
-            <a:r>
-              <a:rPr lang="en-US" sz="2400" dirty="0" err="1">
-                <a:solidFill>
-                  <a:srgbClr val="000000"/>
-                </a:solidFill>
-                <a:ea typeface="Inter"/>
-              </a:rPr>
-              <a:t>sõnumi</a:t>
-            </a:r>
-            <a:endParaRPr lang="en-US" sz="2400" dirty="0">
-              <a:solidFill>
-                <a:srgbClr val="000000"/>
-              </a:solidFill>
-              <a:ea typeface="Inter"/>
-            </a:endParaRPr>
-          </a:p>
-          <a:p>
-            <a:pPr>
-              <a:lnSpc>
-                <a:spcPct val="150000"/>
-              </a:lnSpc>
-            </a:pPr>
-            <a:r>
-              <a:rPr lang="en-US" sz="2400" dirty="0" err="1">
-                <a:solidFill>
-                  <a:srgbClr val="000000"/>
-                </a:solidFill>
-                <a:ea typeface="Inter"/>
-              </a:rPr>
-              <a:t>Üks</a:t>
-            </a:r>
-            <a:r>
-              <a:rPr lang="en-US" sz="2400" dirty="0">
-                <a:solidFill>
-                  <a:srgbClr val="000000"/>
-                </a:solidFill>
-                <a:ea typeface="Inter"/>
-              </a:rPr>
-              <a:t> </a:t>
-            </a:r>
-            <a:r>
-              <a:rPr lang="en-US" sz="2400" dirty="0" err="1">
-                <a:solidFill>
-                  <a:srgbClr val="000000"/>
-                </a:solidFill>
-                <a:ea typeface="Inter"/>
-              </a:rPr>
-              <a:t>põhiline</a:t>
-            </a:r>
-            <a:r>
-              <a:rPr lang="en-US" sz="2400" dirty="0">
-                <a:solidFill>
-                  <a:srgbClr val="000000"/>
-                </a:solidFill>
-                <a:ea typeface="Inter"/>
-              </a:rPr>
-              <a:t> </a:t>
-            </a:r>
-            <a:r>
-              <a:rPr lang="en-US" sz="2400" dirty="0" err="1">
-                <a:solidFill>
-                  <a:srgbClr val="000000"/>
-                </a:solidFill>
-                <a:ea typeface="Inter"/>
-              </a:rPr>
-              <a:t>sõnum</a:t>
-            </a:r>
-            <a:r>
-              <a:rPr lang="en-US" sz="2400" dirty="0">
-                <a:solidFill>
-                  <a:srgbClr val="000000"/>
-                </a:solidFill>
-                <a:ea typeface="Inter"/>
-              </a:rPr>
-              <a:t> </a:t>
-            </a:r>
-            <a:r>
-              <a:rPr lang="en-US" sz="2400" dirty="0" err="1">
-                <a:solidFill>
-                  <a:srgbClr val="000000"/>
-                </a:solidFill>
-                <a:ea typeface="Inter"/>
-              </a:rPr>
-              <a:t>visuaali</a:t>
-            </a:r>
-            <a:r>
-              <a:rPr lang="en-US" sz="2400" dirty="0">
-                <a:solidFill>
-                  <a:srgbClr val="000000"/>
-                </a:solidFill>
-                <a:ea typeface="Inter"/>
-              </a:rPr>
-              <a:t> </a:t>
-            </a:r>
-            <a:r>
-              <a:rPr lang="en-US" sz="2400" dirty="0" err="1">
-                <a:solidFill>
-                  <a:srgbClr val="000000"/>
-                </a:solidFill>
-                <a:ea typeface="Inter"/>
-              </a:rPr>
-              <a:t>kohta</a:t>
-            </a:r>
-            <a:endParaRPr lang="en-US" sz="2400" dirty="0">
-              <a:solidFill>
-                <a:srgbClr val="000000"/>
-              </a:solidFill>
-            </a:endParaRPr>
-          </a:p>
-          <a:p>
-            <a:pPr>
-              <a:lnSpc>
-                <a:spcPct val="150000"/>
-              </a:lnSpc>
-            </a:pPr>
-            <a:r>
-              <a:rPr lang="en-US" sz="2400" dirty="0" err="1">
-                <a:solidFill>
-                  <a:srgbClr val="000000"/>
-                </a:solidFill>
-                <a:ea typeface="Inter"/>
-              </a:rPr>
-              <a:t>Kirjeldava</a:t>
-            </a:r>
-            <a:r>
-              <a:rPr lang="en-US" sz="2400" dirty="0">
-                <a:solidFill>
-                  <a:srgbClr val="000000"/>
-                </a:solidFill>
-                <a:ea typeface="Inter"/>
-              </a:rPr>
-              <a:t> </a:t>
-            </a:r>
-            <a:r>
-              <a:rPr lang="en-US" sz="2400" dirty="0" err="1">
-                <a:solidFill>
-                  <a:srgbClr val="000000"/>
-                </a:solidFill>
-                <a:ea typeface="Inter"/>
-              </a:rPr>
-              <a:t>pealkirja</a:t>
-            </a:r>
-            <a:r>
-              <a:rPr lang="en-US" sz="2400" dirty="0">
-                <a:solidFill>
-                  <a:srgbClr val="000000"/>
-                </a:solidFill>
-                <a:ea typeface="Inter"/>
-              </a:rPr>
-              <a:t> </a:t>
-            </a:r>
-            <a:r>
-              <a:rPr lang="en-US" sz="2400" dirty="0" err="1">
-                <a:solidFill>
-                  <a:srgbClr val="000000"/>
-                </a:solidFill>
-                <a:ea typeface="Inter"/>
-              </a:rPr>
-              <a:t>asemel</a:t>
-            </a:r>
-            <a:r>
-              <a:rPr lang="en-US" sz="2400" dirty="0">
-                <a:solidFill>
-                  <a:srgbClr val="000000"/>
-                </a:solidFill>
-                <a:ea typeface="Inter"/>
-              </a:rPr>
-              <a:t> </a:t>
-            </a:r>
-            <a:r>
-              <a:rPr lang="en-US" sz="2400" dirty="0" err="1">
-                <a:solidFill>
-                  <a:srgbClr val="000000"/>
-                </a:solidFill>
-                <a:ea typeface="Inter"/>
-              </a:rPr>
-              <a:t>järeldusega</a:t>
-            </a:r>
-            <a:r>
-              <a:rPr lang="en-US" sz="2400" dirty="0">
-                <a:solidFill>
-                  <a:srgbClr val="000000"/>
-                </a:solidFill>
-                <a:ea typeface="Inter"/>
-              </a:rPr>
-              <a:t> </a:t>
-            </a:r>
-            <a:r>
-              <a:rPr lang="en-US" sz="2400" dirty="0" err="1">
-                <a:solidFill>
-                  <a:srgbClr val="000000"/>
-                </a:solidFill>
-                <a:ea typeface="Inter"/>
-              </a:rPr>
-              <a:t>pealkiri</a:t>
-            </a:r>
-            <a:endParaRPr lang="en-US" sz="2400" dirty="0">
-              <a:solidFill>
-                <a:srgbClr val="000000"/>
-              </a:solidFill>
-              <a:ea typeface="Inter"/>
-            </a:endParaRPr>
-          </a:p>
-          <a:p>
-            <a:pPr>
-              <a:lnSpc>
-                <a:spcPct val="150000"/>
-              </a:lnSpc>
-            </a:pPr>
-            <a:r>
-              <a:rPr lang="en-US" sz="2400" dirty="0" err="1">
-                <a:solidFill>
-                  <a:srgbClr val="000000"/>
-                </a:solidFill>
-                <a:ea typeface="Inter"/>
-              </a:rPr>
-              <a:t>Minimaalselt</a:t>
-            </a:r>
-            <a:r>
-              <a:rPr lang="en-US" sz="2400" dirty="0">
-                <a:solidFill>
-                  <a:srgbClr val="000000"/>
-                </a:solidFill>
-                <a:ea typeface="Inter"/>
-              </a:rPr>
-              <a:t> </a:t>
-            </a:r>
-            <a:r>
-              <a:rPr lang="en-US" sz="2400" dirty="0" err="1">
-                <a:solidFill>
-                  <a:srgbClr val="000000"/>
-                </a:solidFill>
-                <a:ea typeface="Inter"/>
-              </a:rPr>
-              <a:t>värve</a:t>
-            </a:r>
-            <a:endParaRPr lang="en-US" sz="2400" dirty="0">
-              <a:solidFill>
-                <a:srgbClr val="000000"/>
-              </a:solidFill>
-              <a:ea typeface="Inter"/>
-            </a:endParaRPr>
-          </a:p>
-          <a:p>
-            <a:pPr>
-              <a:lnSpc>
-                <a:spcPct val="150000"/>
-              </a:lnSpc>
-            </a:pPr>
-            <a:endParaRPr lang="en-US" sz="2400" dirty="0">
-              <a:solidFill>
-                <a:srgbClr val="000000"/>
-              </a:solidFill>
-              <a:ea typeface="Inter"/>
-            </a:endParaRPr>
-          </a:p>
-          <a:p>
-            <a:pPr>
-              <a:lnSpc>
-                <a:spcPct val="150000"/>
-              </a:lnSpc>
-            </a:pPr>
-            <a:r>
-              <a:rPr lang="en-US" sz="2400" dirty="0" err="1">
-                <a:solidFill>
-                  <a:srgbClr val="000000"/>
-                </a:solidFill>
-                <a:ea typeface="Inter"/>
-              </a:rPr>
-              <a:t>Inspiratsiooni</a:t>
-            </a:r>
-            <a:r>
-              <a:rPr lang="en-US" sz="2400" dirty="0">
-                <a:solidFill>
-                  <a:srgbClr val="000000"/>
-                </a:solidFill>
-                <a:ea typeface="Inter"/>
-              </a:rPr>
-              <a:t>: </a:t>
-            </a:r>
-            <a:r>
-              <a:rPr lang="en-US" sz="2400" dirty="0">
-                <a:solidFill>
-                  <a:srgbClr val="000000"/>
-                </a:solidFill>
-                <a:ea typeface="+mn-lt"/>
-                <a:cs typeface="+mn-lt"/>
-                <a:hlinkClick r:id="rId3"/>
-              </a:rPr>
-              <a:t>https://www.storytellingwithdata.com/</a:t>
-            </a:r>
-            <a:r>
-              <a:rPr lang="en-US" sz="2400" dirty="0">
-                <a:solidFill>
-                  <a:srgbClr val="000000"/>
-                </a:solidFill>
-                <a:ea typeface="+mn-lt"/>
-                <a:cs typeface="+mn-lt"/>
-              </a:rPr>
-              <a:t> </a:t>
-            </a:r>
-            <a:endParaRPr lang="en-US" sz="2400" dirty="0">
-              <a:solidFill>
-                <a:srgbClr val="000000"/>
-              </a:solidFill>
-              <a:ea typeface="Inter"/>
-            </a:endParaRPr>
-          </a:p>
-          <a:p>
-            <a:pPr>
-              <a:lnSpc>
-                <a:spcPct val="150000"/>
-              </a:lnSpc>
-            </a:pPr>
-            <a:r>
-              <a:rPr lang="en-US" sz="2400" dirty="0" err="1">
-                <a:solidFill>
-                  <a:srgbClr val="000000"/>
-                </a:solidFill>
-                <a:ea typeface="Inter"/>
-              </a:rPr>
-              <a:t>Andmepärli</a:t>
-            </a:r>
-            <a:r>
-              <a:rPr lang="en-US" sz="2400" dirty="0">
-                <a:solidFill>
-                  <a:srgbClr val="000000"/>
-                </a:solidFill>
-                <a:ea typeface="Inter"/>
-              </a:rPr>
-              <a:t> </a:t>
-            </a:r>
-            <a:r>
-              <a:rPr lang="en-US" sz="2400" dirty="0" err="1">
-                <a:solidFill>
-                  <a:srgbClr val="000000"/>
-                </a:solidFill>
-                <a:ea typeface="Inter"/>
-              </a:rPr>
-              <a:t>konkurss</a:t>
-            </a:r>
-            <a:r>
-              <a:rPr lang="en-US" sz="2400" dirty="0">
-                <a:solidFill>
-                  <a:srgbClr val="000000"/>
-                </a:solidFill>
-                <a:ea typeface="Inter"/>
-              </a:rPr>
-              <a:t>: </a:t>
-            </a:r>
-            <a:r>
-              <a:rPr lang="en-US" sz="2400" dirty="0">
-                <a:solidFill>
-                  <a:srgbClr val="000000"/>
-                </a:solidFill>
-                <a:ea typeface="+mn-lt"/>
-                <a:cs typeface="+mn-lt"/>
-                <a:hlinkClick r:id="rId4"/>
-              </a:rPr>
-              <a:t>https://stat.ee/et/statistikaamet/meist/konkurss-andmeparl</a:t>
-            </a:r>
-            <a:r>
-              <a:rPr lang="en-US" sz="2400" dirty="0">
-                <a:solidFill>
-                  <a:srgbClr val="000000"/>
-                </a:solidFill>
-                <a:ea typeface="+mn-lt"/>
-                <a:cs typeface="+mn-lt"/>
-              </a:rPr>
-              <a:t> </a:t>
-            </a:r>
-          </a:p>
-          <a:p>
-            <a:pPr marL="0" indent="0">
-              <a:lnSpc>
-                <a:spcPct val="150000"/>
-              </a:lnSpc>
-              <a:buNone/>
-            </a:pPr>
-            <a:endParaRPr lang="en-US" sz="2400" dirty="0">
-              <a:solidFill>
-                <a:srgbClr val="000000"/>
-              </a:solidFill>
-              <a:ea typeface="Inter"/>
-            </a:endParaRPr>
-          </a:p>
-          <a:p>
-            <a:pPr>
-              <a:lnSpc>
-                <a:spcPct val="150000"/>
-              </a:lnSpc>
-            </a:pPr>
-            <a:endParaRPr lang="en-US" sz="2400" dirty="0">
-              <a:solidFill>
-                <a:srgbClr val="000000"/>
-              </a:solidFill>
-              <a:ea typeface="Inter"/>
-            </a:endParaRPr>
-          </a:p>
-        </p:txBody>
-      </p:sp>
-    </p:spTree>
-    <p:extLst>
-      <p:ext uri="{BB962C8B-B14F-4D97-AF65-F5344CB8AC3E}">
-        <p14:creationId xmlns:p14="http://schemas.microsoft.com/office/powerpoint/2010/main" val="1920893319"/>
       </p:ext>
     </p:extLst>
   </p:cSld>
@@ -28146,6 +27748,586 @@
         <p:cNvPr id="1" name="">
           <a:extLst>
             <a:ext uri="{FF2B5EF4-FFF2-40B4-BE49-F238E27FC236}">
+              <a16:creationId xmlns:a16="http://schemas.microsoft.com/office/drawing/2014/main" id="{C2769484-4C76-162B-D0A1-45BF448ABC46}"/>
+            </a:ext>
+          </a:extLst>
+        </p:cNvPr>
+        <p:cNvGrpSpPr/>
+        <p:nvPr/>
+      </p:nvGrpSpPr>
+      <p:grpSpPr>
+        <a:xfrm>
+          <a:off x="0" y="0"/>
+          <a:ext cx="0" cy="0"/>
+          <a:chOff x="0" y="0"/>
+          <a:chExt cx="0" cy="0"/>
+        </a:xfrm>
+      </p:grpSpPr>
+      <p:sp>
+        <p:nvSpPr>
+          <p:cNvPr id="2" name="Title 1">
+            <a:extLst>
+              <a:ext uri="{FF2B5EF4-FFF2-40B4-BE49-F238E27FC236}">
+                <a16:creationId xmlns:a16="http://schemas.microsoft.com/office/drawing/2014/main" id="{5BBBDC7B-D396-F1F4-9065-942A05C79CD7}"/>
+              </a:ext>
+            </a:extLst>
+          </p:cNvPr>
+          <p:cNvSpPr>
+            <a:spLocks noGrp="1"/>
+          </p:cNvSpPr>
+          <p:nvPr>
+            <p:ph type="ctrTitle"/>
+          </p:nvPr>
+        </p:nvSpPr>
+        <p:spPr/>
+        <p:txBody>
+          <a:bodyPr/>
+          <a:lstStyle/>
+          <a:p>
+            <a:r>
+              <a:rPr lang="en-US" err="1"/>
+              <a:t>Andmeloo</a:t>
+            </a:r>
+            <a:r>
+              <a:rPr lang="en-US"/>
+              <a:t> </a:t>
+            </a:r>
+            <a:r>
+              <a:rPr lang="en-US" err="1"/>
+              <a:t>jutustamine</a:t>
+            </a:r>
+          </a:p>
+        </p:txBody>
+      </p:sp>
+      <p:sp>
+        <p:nvSpPr>
+          <p:cNvPr id="3" name="Content Placeholder 2">
+            <a:extLst>
+              <a:ext uri="{FF2B5EF4-FFF2-40B4-BE49-F238E27FC236}">
+                <a16:creationId xmlns:a16="http://schemas.microsoft.com/office/drawing/2014/main" id="{0E976C14-59CC-5214-7F12-0F82D85E4D18}"/>
+              </a:ext>
+            </a:extLst>
+          </p:cNvPr>
+          <p:cNvSpPr>
+            <a:spLocks noGrp="1"/>
+          </p:cNvSpPr>
+          <p:nvPr>
+            <p:ph sz="quarter" idx="10"/>
+          </p:nvPr>
+        </p:nvSpPr>
+        <p:spPr/>
+        <p:txBody>
+          <a:bodyPr/>
+          <a:lstStyle/>
+          <a:p>
+            <a:pPr>
+              <a:lnSpc>
+                <a:spcPct val="150000"/>
+              </a:lnSpc>
+            </a:pPr>
+            <a:r>
+              <a:rPr lang="en-US" sz="2400" dirty="0">
+                <a:solidFill>
+                  <a:srgbClr val="000000"/>
+                </a:solidFill>
+                <a:ea typeface="Inter"/>
+              </a:rPr>
+              <a:t>Kui </a:t>
+            </a:r>
+            <a:r>
+              <a:rPr lang="en-US" sz="2400" dirty="0" err="1">
+                <a:solidFill>
+                  <a:srgbClr val="000000"/>
+                </a:solidFill>
+                <a:ea typeface="Inter"/>
+              </a:rPr>
+              <a:t>tahad</a:t>
+            </a:r>
+            <a:r>
+              <a:rPr lang="en-US" sz="2400" dirty="0">
+                <a:solidFill>
+                  <a:srgbClr val="000000"/>
+                </a:solidFill>
+                <a:ea typeface="Inter"/>
+              </a:rPr>
+              <a:t> </a:t>
+            </a:r>
+            <a:r>
+              <a:rPr lang="en-US" sz="2400" dirty="0" err="1">
+                <a:solidFill>
+                  <a:srgbClr val="000000"/>
+                </a:solidFill>
+                <a:ea typeface="Inter"/>
+              </a:rPr>
+              <a:t>edasi</a:t>
+            </a:r>
+            <a:r>
+              <a:rPr lang="en-US" sz="2400" dirty="0">
+                <a:solidFill>
+                  <a:srgbClr val="000000"/>
+                </a:solidFill>
+                <a:ea typeface="Inter"/>
+              </a:rPr>
+              <a:t> </a:t>
+            </a:r>
+            <a:r>
+              <a:rPr lang="en-US" sz="2400" dirty="0" err="1">
+                <a:solidFill>
+                  <a:srgbClr val="000000"/>
+                </a:solidFill>
+                <a:ea typeface="Inter"/>
+              </a:rPr>
+              <a:t>anda</a:t>
+            </a:r>
+            <a:r>
+              <a:rPr lang="en-US" sz="2400" dirty="0">
+                <a:solidFill>
+                  <a:srgbClr val="000000"/>
+                </a:solidFill>
+                <a:ea typeface="Inter"/>
+              </a:rPr>
+              <a:t> </a:t>
+            </a:r>
+            <a:r>
+              <a:rPr lang="en-US" sz="2400" dirty="0" err="1">
+                <a:solidFill>
+                  <a:srgbClr val="000000"/>
+                </a:solidFill>
+                <a:ea typeface="Inter"/>
+              </a:rPr>
+              <a:t>kindla</a:t>
+            </a:r>
+            <a:r>
+              <a:rPr lang="en-US" sz="2400" dirty="0">
+                <a:solidFill>
+                  <a:srgbClr val="000000"/>
+                </a:solidFill>
+                <a:ea typeface="Inter"/>
+              </a:rPr>
+              <a:t> </a:t>
+            </a:r>
+            <a:r>
+              <a:rPr lang="en-US" sz="2400" dirty="0" err="1">
+                <a:solidFill>
+                  <a:srgbClr val="000000"/>
+                </a:solidFill>
+                <a:ea typeface="Inter"/>
+              </a:rPr>
+              <a:t>sõnumi</a:t>
+            </a:r>
+            <a:endParaRPr lang="en-US" sz="2400" dirty="0">
+              <a:solidFill>
+                <a:srgbClr val="000000"/>
+              </a:solidFill>
+              <a:ea typeface="Inter"/>
+            </a:endParaRPr>
+          </a:p>
+          <a:p>
+            <a:pPr>
+              <a:lnSpc>
+                <a:spcPct val="150000"/>
+              </a:lnSpc>
+            </a:pPr>
+            <a:r>
+              <a:rPr lang="en-US" sz="2400" dirty="0" err="1">
+                <a:solidFill>
+                  <a:srgbClr val="000000"/>
+                </a:solidFill>
+                <a:ea typeface="Inter"/>
+              </a:rPr>
+              <a:t>Üks</a:t>
+            </a:r>
+            <a:r>
+              <a:rPr lang="en-US" sz="2400" dirty="0">
+                <a:solidFill>
+                  <a:srgbClr val="000000"/>
+                </a:solidFill>
+                <a:ea typeface="Inter"/>
+              </a:rPr>
+              <a:t> </a:t>
+            </a:r>
+            <a:r>
+              <a:rPr lang="en-US" sz="2400" dirty="0" err="1">
+                <a:solidFill>
+                  <a:srgbClr val="000000"/>
+                </a:solidFill>
+                <a:ea typeface="Inter"/>
+              </a:rPr>
+              <a:t>põhiline</a:t>
+            </a:r>
+            <a:r>
+              <a:rPr lang="en-US" sz="2400" dirty="0">
+                <a:solidFill>
+                  <a:srgbClr val="000000"/>
+                </a:solidFill>
+                <a:ea typeface="Inter"/>
+              </a:rPr>
+              <a:t> </a:t>
+            </a:r>
+            <a:r>
+              <a:rPr lang="en-US" sz="2400" dirty="0" err="1">
+                <a:solidFill>
+                  <a:srgbClr val="000000"/>
+                </a:solidFill>
+                <a:ea typeface="Inter"/>
+              </a:rPr>
+              <a:t>sõnum</a:t>
+            </a:r>
+            <a:r>
+              <a:rPr lang="en-US" sz="2400" dirty="0">
+                <a:solidFill>
+                  <a:srgbClr val="000000"/>
+                </a:solidFill>
+                <a:ea typeface="Inter"/>
+              </a:rPr>
+              <a:t> </a:t>
+            </a:r>
+            <a:r>
+              <a:rPr lang="en-US" sz="2400" dirty="0" err="1">
+                <a:solidFill>
+                  <a:srgbClr val="000000"/>
+                </a:solidFill>
+                <a:ea typeface="Inter"/>
+              </a:rPr>
+              <a:t>visuaali</a:t>
+            </a:r>
+            <a:r>
+              <a:rPr lang="en-US" sz="2400" dirty="0">
+                <a:solidFill>
+                  <a:srgbClr val="000000"/>
+                </a:solidFill>
+                <a:ea typeface="Inter"/>
+              </a:rPr>
+              <a:t> </a:t>
+            </a:r>
+            <a:r>
+              <a:rPr lang="en-US" sz="2400" dirty="0" err="1">
+                <a:solidFill>
+                  <a:srgbClr val="000000"/>
+                </a:solidFill>
+                <a:ea typeface="Inter"/>
+              </a:rPr>
+              <a:t>kohta</a:t>
+            </a:r>
+            <a:endParaRPr lang="en-US" sz="2400" dirty="0">
+              <a:solidFill>
+                <a:srgbClr val="000000"/>
+              </a:solidFill>
+            </a:endParaRPr>
+          </a:p>
+          <a:p>
+            <a:pPr>
+              <a:lnSpc>
+                <a:spcPct val="150000"/>
+              </a:lnSpc>
+            </a:pPr>
+            <a:r>
+              <a:rPr lang="en-US" sz="2400" dirty="0" err="1">
+                <a:solidFill>
+                  <a:srgbClr val="000000"/>
+                </a:solidFill>
+                <a:ea typeface="Inter"/>
+              </a:rPr>
+              <a:t>Kirjeldava</a:t>
+            </a:r>
+            <a:r>
+              <a:rPr lang="en-US" sz="2400" dirty="0">
+                <a:solidFill>
+                  <a:srgbClr val="000000"/>
+                </a:solidFill>
+                <a:ea typeface="Inter"/>
+              </a:rPr>
+              <a:t> </a:t>
+            </a:r>
+            <a:r>
+              <a:rPr lang="en-US" sz="2400" dirty="0" err="1">
+                <a:solidFill>
+                  <a:srgbClr val="000000"/>
+                </a:solidFill>
+                <a:ea typeface="Inter"/>
+              </a:rPr>
+              <a:t>pealkirja</a:t>
+            </a:r>
+            <a:r>
+              <a:rPr lang="en-US" sz="2400" dirty="0">
+                <a:solidFill>
+                  <a:srgbClr val="000000"/>
+                </a:solidFill>
+                <a:ea typeface="Inter"/>
+              </a:rPr>
+              <a:t> </a:t>
+            </a:r>
+            <a:r>
+              <a:rPr lang="en-US" sz="2400" dirty="0" err="1">
+                <a:solidFill>
+                  <a:srgbClr val="000000"/>
+                </a:solidFill>
+                <a:ea typeface="Inter"/>
+              </a:rPr>
+              <a:t>asemel</a:t>
+            </a:r>
+            <a:r>
+              <a:rPr lang="en-US" sz="2400" dirty="0">
+                <a:solidFill>
+                  <a:srgbClr val="000000"/>
+                </a:solidFill>
+                <a:ea typeface="Inter"/>
+              </a:rPr>
+              <a:t> </a:t>
+            </a:r>
+            <a:r>
+              <a:rPr lang="en-US" sz="2400" dirty="0" err="1">
+                <a:solidFill>
+                  <a:srgbClr val="000000"/>
+                </a:solidFill>
+                <a:ea typeface="Inter"/>
+              </a:rPr>
+              <a:t>järeldusega</a:t>
+            </a:r>
+            <a:r>
+              <a:rPr lang="en-US" sz="2400" dirty="0">
+                <a:solidFill>
+                  <a:srgbClr val="000000"/>
+                </a:solidFill>
+                <a:ea typeface="Inter"/>
+              </a:rPr>
+              <a:t> </a:t>
+            </a:r>
+            <a:r>
+              <a:rPr lang="en-US" sz="2400" dirty="0" err="1">
+                <a:solidFill>
+                  <a:srgbClr val="000000"/>
+                </a:solidFill>
+                <a:ea typeface="Inter"/>
+              </a:rPr>
+              <a:t>pealkiri</a:t>
+            </a:r>
+            <a:endParaRPr lang="en-US" sz="2400" dirty="0">
+              <a:solidFill>
+                <a:srgbClr val="000000"/>
+              </a:solidFill>
+              <a:ea typeface="Inter"/>
+            </a:endParaRPr>
+          </a:p>
+          <a:p>
+            <a:pPr>
+              <a:lnSpc>
+                <a:spcPct val="150000"/>
+              </a:lnSpc>
+            </a:pPr>
+            <a:r>
+              <a:rPr lang="en-US" sz="2400" dirty="0" err="1">
+                <a:solidFill>
+                  <a:srgbClr val="000000"/>
+                </a:solidFill>
+                <a:ea typeface="Inter"/>
+              </a:rPr>
+              <a:t>Minimaalselt</a:t>
+            </a:r>
+            <a:r>
+              <a:rPr lang="en-US" sz="2400" dirty="0">
+                <a:solidFill>
+                  <a:srgbClr val="000000"/>
+                </a:solidFill>
+                <a:ea typeface="Inter"/>
+              </a:rPr>
+              <a:t> </a:t>
+            </a:r>
+            <a:r>
+              <a:rPr lang="en-US" sz="2400" dirty="0" err="1">
+                <a:solidFill>
+                  <a:srgbClr val="000000"/>
+                </a:solidFill>
+                <a:ea typeface="Inter"/>
+              </a:rPr>
+              <a:t>värve</a:t>
+            </a:r>
+            <a:endParaRPr lang="en-US" sz="2400" dirty="0">
+              <a:solidFill>
+                <a:srgbClr val="000000"/>
+              </a:solidFill>
+              <a:ea typeface="Inter"/>
+            </a:endParaRPr>
+          </a:p>
+          <a:p>
+            <a:pPr>
+              <a:lnSpc>
+                <a:spcPct val="150000"/>
+              </a:lnSpc>
+            </a:pPr>
+            <a:endParaRPr lang="en-US" sz="2400" dirty="0">
+              <a:solidFill>
+                <a:srgbClr val="000000"/>
+              </a:solidFill>
+              <a:ea typeface="Inter"/>
+            </a:endParaRPr>
+          </a:p>
+          <a:p>
+            <a:pPr>
+              <a:lnSpc>
+                <a:spcPct val="150000"/>
+              </a:lnSpc>
+            </a:pPr>
+            <a:r>
+              <a:rPr lang="en-US" sz="2400" dirty="0" err="1">
+                <a:solidFill>
+                  <a:srgbClr val="000000"/>
+                </a:solidFill>
+                <a:ea typeface="Inter"/>
+              </a:rPr>
+              <a:t>Inspiratsiooni</a:t>
+            </a:r>
+            <a:r>
+              <a:rPr lang="en-US" sz="2400" dirty="0">
+                <a:solidFill>
+                  <a:srgbClr val="000000"/>
+                </a:solidFill>
+                <a:ea typeface="Inter"/>
+              </a:rPr>
+              <a:t>: </a:t>
+            </a:r>
+            <a:r>
+              <a:rPr lang="en-US" sz="2400" dirty="0">
+                <a:solidFill>
+                  <a:srgbClr val="000000"/>
+                </a:solidFill>
+                <a:ea typeface="+mn-lt"/>
+                <a:cs typeface="+mn-lt"/>
+                <a:hlinkClick r:id="rId3"/>
+              </a:rPr>
+              <a:t>https://www.storytellingwithdata.com/</a:t>
+            </a:r>
+            <a:r>
+              <a:rPr lang="en-US" sz="2400" dirty="0">
+                <a:solidFill>
+                  <a:srgbClr val="000000"/>
+                </a:solidFill>
+                <a:ea typeface="+mn-lt"/>
+                <a:cs typeface="+mn-lt"/>
+              </a:rPr>
+              <a:t> </a:t>
+            </a:r>
+            <a:endParaRPr lang="en-US" sz="2400" dirty="0">
+              <a:solidFill>
+                <a:srgbClr val="000000"/>
+              </a:solidFill>
+              <a:ea typeface="Inter"/>
+            </a:endParaRPr>
+          </a:p>
+          <a:p>
+            <a:pPr>
+              <a:lnSpc>
+                <a:spcPct val="150000"/>
+              </a:lnSpc>
+            </a:pPr>
+            <a:r>
+              <a:rPr lang="en-US" sz="2400" dirty="0" err="1">
+                <a:solidFill>
+                  <a:srgbClr val="000000"/>
+                </a:solidFill>
+                <a:ea typeface="Inter"/>
+              </a:rPr>
+              <a:t>Andmepärli</a:t>
+            </a:r>
+            <a:r>
+              <a:rPr lang="en-US" sz="2400" dirty="0">
+                <a:solidFill>
+                  <a:srgbClr val="000000"/>
+                </a:solidFill>
+                <a:ea typeface="Inter"/>
+              </a:rPr>
+              <a:t> </a:t>
+            </a:r>
+            <a:r>
+              <a:rPr lang="en-US" sz="2400" dirty="0" err="1">
+                <a:solidFill>
+                  <a:srgbClr val="000000"/>
+                </a:solidFill>
+                <a:ea typeface="Inter"/>
+              </a:rPr>
+              <a:t>konkurss</a:t>
+            </a:r>
+            <a:r>
+              <a:rPr lang="en-US" sz="2400" dirty="0">
+                <a:solidFill>
+                  <a:srgbClr val="000000"/>
+                </a:solidFill>
+                <a:ea typeface="Inter"/>
+              </a:rPr>
+              <a:t>: </a:t>
+            </a:r>
+            <a:r>
+              <a:rPr lang="en-US" sz="2400" dirty="0">
+                <a:solidFill>
+                  <a:srgbClr val="000000"/>
+                </a:solidFill>
+                <a:ea typeface="+mn-lt"/>
+                <a:cs typeface="+mn-lt"/>
+                <a:hlinkClick r:id="rId4"/>
+              </a:rPr>
+              <a:t>https://stat.ee/et/statistikaamet/meist/konkurss-andmeparl</a:t>
+            </a:r>
+            <a:r>
+              <a:rPr lang="en-US" sz="2400" dirty="0">
+                <a:solidFill>
+                  <a:srgbClr val="000000"/>
+                </a:solidFill>
+                <a:ea typeface="+mn-lt"/>
+                <a:cs typeface="+mn-lt"/>
+              </a:rPr>
+              <a:t> </a:t>
+            </a:r>
+          </a:p>
+          <a:p>
+            <a:pPr marL="0" indent="0">
+              <a:lnSpc>
+                <a:spcPct val="150000"/>
+              </a:lnSpc>
+              <a:buNone/>
+            </a:pPr>
+            <a:endParaRPr lang="en-US" sz="2400" dirty="0">
+              <a:solidFill>
+                <a:srgbClr val="000000"/>
+              </a:solidFill>
+              <a:ea typeface="Inter"/>
+            </a:endParaRPr>
+          </a:p>
+          <a:p>
+            <a:pPr>
+              <a:lnSpc>
+                <a:spcPct val="150000"/>
+              </a:lnSpc>
+            </a:pPr>
+            <a:endParaRPr lang="en-US" sz="2400" dirty="0">
+              <a:solidFill>
+                <a:srgbClr val="000000"/>
+              </a:solidFill>
+              <a:ea typeface="Inter"/>
+            </a:endParaRPr>
+          </a:p>
+        </p:txBody>
+      </p:sp>
+    </p:spTree>
+    <p:extLst>
+      <p:ext uri="{BB962C8B-B14F-4D97-AF65-F5344CB8AC3E}">
+        <p14:creationId xmlns:p14="http://schemas.microsoft.com/office/powerpoint/2010/main" val="1920893319"/>
+      </p:ext>
+    </p:extLst>
+  </p:cSld>
+  <p:clrMapOvr>
+    <a:masterClrMapping/>
+  </p:clrMapOvr>
+</p:sld>
+</file>
+
+<file path=ppt/slides/slide21.xml><?xml version="1.0" encoding="utf-8"?>
+<p:sld xmlns:a="http://schemas.openxmlformats.org/drawingml/2006/main" xmlns:r="http://schemas.openxmlformats.org/officeDocument/2006/relationships" xmlns:p="http://schemas.openxmlformats.org/presentationml/2006/main">
+  <p:cSld>
+    <p:spTree>
+      <p:nvGrpSpPr>
+        <p:cNvPr id="1" name="">
+          <a:extLst>
+            <a:ext uri="{FF2B5EF4-FFF2-40B4-BE49-F238E27FC236}">
               <a16:creationId xmlns:a16="http://schemas.microsoft.com/office/drawing/2014/main" id="{4F02162B-AE13-BD52-4200-1745BFF2F462}"/>
             </a:ext>
           </a:extLst>
@@ -28454,7 +28636,7 @@
 </p:sld>
 </file>
 
-<file path=ppt/slides/slide21.xml><?xml version="1.0" encoding="utf-8"?>
+<file path=ppt/slides/slide22.xml><?xml version="1.0" encoding="utf-8"?>
 <p:sld xmlns:a="http://schemas.openxmlformats.org/drawingml/2006/main" xmlns:r="http://schemas.openxmlformats.org/officeDocument/2006/relationships" xmlns:p="http://schemas.openxmlformats.org/presentationml/2006/main">
   <p:cSld>
     <p:spTree>
@@ -29100,6 +29282,442 @@
   <p:cSld>
     <p:spTree>
       <p:nvGrpSpPr>
+        <p:cNvPr id="1" name=""/>
+        <p:cNvGrpSpPr/>
+        <p:nvPr/>
+      </p:nvGrpSpPr>
+      <p:grpSpPr>
+        <a:xfrm>
+          <a:off x="0" y="0"/>
+          <a:ext cx="0" cy="0"/>
+          <a:chOff x="0" y="0"/>
+          <a:chExt cx="0" cy="0"/>
+        </a:xfrm>
+      </p:grpSpPr>
+      <p:sp>
+        <p:nvSpPr>
+          <p:cNvPr id="2" name="Title 1">
+            <a:extLst>
+              <a:ext uri="{FF2B5EF4-FFF2-40B4-BE49-F238E27FC236}">
+                <a16:creationId xmlns:a16="http://schemas.microsoft.com/office/drawing/2014/main" id="{1524985D-536E-5D52-E9A5-AA1E3944782F}"/>
+              </a:ext>
+            </a:extLst>
+          </p:cNvPr>
+          <p:cNvSpPr>
+            <a:spLocks noGrp="1"/>
+          </p:cNvSpPr>
+          <p:nvPr>
+            <p:ph type="ctrTitle"/>
+          </p:nvPr>
+        </p:nvSpPr>
+        <p:spPr>
+          <a:xfrm>
+            <a:off x="623887" y="479570"/>
+            <a:ext cx="11168719" cy="392789"/>
+          </a:xfrm>
+        </p:spPr>
+        <p:txBody>
+          <a:bodyPr/>
+          <a:lstStyle/>
+          <a:p>
+            <a:r>
+              <a:rPr lang="en-US" dirty="0" err="1"/>
+              <a:t>Harjutus</a:t>
+            </a:r>
+            <a:r>
+              <a:rPr lang="en-US" dirty="0"/>
+              <a:t> – </a:t>
+            </a:r>
+            <a:r>
+              <a:rPr lang="en-US" dirty="0" err="1"/>
+              <a:t>muudame</a:t>
+            </a:r>
+            <a:r>
+              <a:rPr lang="en-US" dirty="0"/>
+              <a:t> </a:t>
+            </a:r>
+            <a:r>
+              <a:rPr lang="en-US" dirty="0" err="1"/>
+              <a:t>andmeallikad</a:t>
+            </a:r>
+            <a:r>
+              <a:rPr lang="en-US" dirty="0"/>
+              <a:t> </a:t>
+            </a:r>
+            <a:r>
+              <a:rPr lang="en-US" dirty="0" err="1"/>
+              <a:t>veebipõhiseks</a:t>
+            </a:r>
+            <a:endParaRPr lang="et-EE" dirty="0"/>
+          </a:p>
+        </p:txBody>
+      </p:sp>
+      <p:sp>
+        <p:nvSpPr>
+          <p:cNvPr id="3" name="Content Placeholder 2">
+            <a:extLst>
+              <a:ext uri="{FF2B5EF4-FFF2-40B4-BE49-F238E27FC236}">
+                <a16:creationId xmlns:a16="http://schemas.microsoft.com/office/drawing/2014/main" id="{C53EAF1F-B8FA-F7FE-8F42-5998CE884202}"/>
+              </a:ext>
+            </a:extLst>
+          </p:cNvPr>
+          <p:cNvSpPr>
+            <a:spLocks noGrp="1"/>
+          </p:cNvSpPr>
+          <p:nvPr>
+            <p:ph sz="quarter" idx="10"/>
+          </p:nvPr>
+        </p:nvSpPr>
+        <p:spPr/>
+        <p:txBody>
+          <a:bodyPr/>
+          <a:lstStyle/>
+          <a:p>
+            <a:pPr>
+              <a:lnSpc>
+                <a:spcPct val="150000"/>
+              </a:lnSpc>
+            </a:pPr>
+            <a:r>
+              <a:rPr lang="en-US" sz="2400" dirty="0"/>
+              <a:t>Lae alla Day3 </a:t>
+            </a:r>
+            <a:r>
+              <a:rPr lang="en-US" sz="2400" dirty="0">
+                <a:sym typeface="Wingdings" panose="05000000000000000000" pitchFamily="2" charset="2"/>
+              </a:rPr>
+              <a:t> DataSourcesDay3</a:t>
+            </a:r>
+          </a:p>
+          <a:p>
+            <a:pPr lvl="1">
+              <a:lnSpc>
+                <a:spcPct val="150000"/>
+              </a:lnSpc>
+            </a:pPr>
+            <a:r>
+              <a:rPr lang="en-US" sz="2400" dirty="0">
+                <a:sym typeface="Wingdings" panose="05000000000000000000" pitchFamily="2" charset="2"/>
+              </a:rPr>
+              <a:t>Unzip</a:t>
+            </a:r>
+          </a:p>
+          <a:p>
+            <a:pPr lvl="1">
+              <a:lnSpc>
+                <a:spcPct val="150000"/>
+              </a:lnSpc>
+            </a:pPr>
+            <a:r>
+              <a:rPr lang="en-US" sz="2400" dirty="0" err="1">
+                <a:sym typeface="Wingdings" panose="05000000000000000000" pitchFamily="2" charset="2"/>
+              </a:rPr>
+              <a:t>Kopeeri</a:t>
+            </a:r>
+            <a:r>
+              <a:rPr lang="en-US" sz="2400" dirty="0">
+                <a:sym typeface="Wingdings" panose="05000000000000000000" pitchFamily="2" charset="2"/>
+              </a:rPr>
+              <a:t> </a:t>
+            </a:r>
+            <a:r>
+              <a:rPr lang="en-US" sz="2400" dirty="0" err="1">
+                <a:sym typeface="Wingdings" panose="05000000000000000000" pitchFamily="2" charset="2"/>
+              </a:rPr>
+              <a:t>oma</a:t>
+            </a:r>
+            <a:r>
+              <a:rPr lang="en-US" sz="2400" dirty="0">
+                <a:sym typeface="Wingdings" panose="05000000000000000000" pitchFamily="2" charset="2"/>
+              </a:rPr>
+              <a:t> “andmetarkus2026” </a:t>
+            </a:r>
+            <a:r>
+              <a:rPr lang="en-US" sz="2400" dirty="0" err="1">
+                <a:sym typeface="Wingdings" panose="05000000000000000000" pitchFamily="2" charset="2"/>
+              </a:rPr>
+              <a:t>kausta</a:t>
+            </a:r>
+            <a:endParaRPr lang="en-US" sz="2400" dirty="0">
+              <a:sym typeface="Wingdings" panose="05000000000000000000" pitchFamily="2" charset="2"/>
+            </a:endParaRPr>
+          </a:p>
+          <a:p>
+            <a:pPr>
+              <a:lnSpc>
+                <a:spcPct val="150000"/>
+              </a:lnSpc>
+            </a:pPr>
+            <a:r>
+              <a:rPr lang="en-US" sz="2400" dirty="0">
+                <a:sym typeface="Wingdings" panose="05000000000000000000" pitchFamily="2" charset="2"/>
+              </a:rPr>
+              <a:t>Lae Visual Studio Code </a:t>
+            </a:r>
+            <a:r>
+              <a:rPr lang="en-US" sz="2400" dirty="0" err="1">
+                <a:sym typeface="Wingdings" panose="05000000000000000000" pitchFamily="2" charset="2"/>
+              </a:rPr>
+              <a:t>kaudu</a:t>
+            </a:r>
+            <a:r>
+              <a:rPr lang="en-US" sz="2400" dirty="0">
+                <a:sym typeface="Wingdings" panose="05000000000000000000" pitchFamily="2" charset="2"/>
+              </a:rPr>
+              <a:t> </a:t>
+            </a:r>
+            <a:r>
+              <a:rPr lang="en-US" sz="2400" dirty="0" err="1">
+                <a:sym typeface="Wingdings" panose="05000000000000000000" pitchFamily="2" charset="2"/>
+              </a:rPr>
+              <a:t>üles</a:t>
+            </a:r>
+            <a:r>
+              <a:rPr lang="en-US" sz="2400" dirty="0">
+                <a:sym typeface="Wingdings" panose="05000000000000000000" pitchFamily="2" charset="2"/>
+              </a:rPr>
+              <a:t> </a:t>
+            </a:r>
+            <a:r>
+              <a:rPr lang="en-US" sz="2400" dirty="0" err="1">
+                <a:sym typeface="Wingdings" panose="05000000000000000000" pitchFamily="2" charset="2"/>
+              </a:rPr>
+              <a:t>GitHubi</a:t>
+            </a:r>
+            <a:endParaRPr lang="en-US" sz="2400" dirty="0">
+              <a:sym typeface="Wingdings" panose="05000000000000000000" pitchFamily="2" charset="2"/>
+            </a:endParaRPr>
+          </a:p>
+          <a:p>
+            <a:pPr>
+              <a:lnSpc>
+                <a:spcPct val="150000"/>
+              </a:lnSpc>
+            </a:pPr>
+            <a:r>
+              <a:rPr lang="en-US" sz="2400" dirty="0" err="1">
+                <a:sym typeface="Wingdings" panose="05000000000000000000" pitchFamily="2" charset="2"/>
+              </a:rPr>
+              <a:t>Võta</a:t>
+            </a:r>
+            <a:r>
+              <a:rPr lang="en-US" sz="2400" dirty="0">
+                <a:sym typeface="Wingdings" panose="05000000000000000000" pitchFamily="2" charset="2"/>
+              </a:rPr>
+              <a:t> </a:t>
+            </a:r>
+            <a:r>
+              <a:rPr lang="en-US" sz="2400" dirty="0" err="1">
+                <a:sym typeface="Wingdings" panose="05000000000000000000" pitchFamily="2" charset="2"/>
+              </a:rPr>
+              <a:t>GitHubist</a:t>
+            </a:r>
+            <a:r>
+              <a:rPr lang="en-US" sz="2400" dirty="0">
+                <a:sym typeface="Wingdings" panose="05000000000000000000" pitchFamily="2" charset="2"/>
+              </a:rPr>
+              <a:t> </a:t>
+            </a:r>
+            <a:r>
+              <a:rPr lang="en-US" sz="2400" dirty="0" err="1">
+                <a:sym typeface="Wingdings" panose="05000000000000000000" pitchFamily="2" charset="2"/>
+              </a:rPr>
+              <a:t>faili</a:t>
+            </a:r>
+            <a:r>
+              <a:rPr lang="en-US" sz="2400" dirty="0">
+                <a:sym typeface="Wingdings" panose="05000000000000000000" pitchFamily="2" charset="2"/>
+              </a:rPr>
+              <a:t> link </a:t>
+            </a:r>
+          </a:p>
+          <a:p>
+            <a:pPr lvl="1">
+              <a:lnSpc>
+                <a:spcPct val="150000"/>
+              </a:lnSpc>
+            </a:pPr>
+            <a:r>
+              <a:rPr lang="en-US" sz="2400" dirty="0">
+                <a:sym typeface="Wingdings" panose="05000000000000000000" pitchFamily="2" charset="2"/>
+              </a:rPr>
+              <a:t>Ava </a:t>
+            </a:r>
+            <a:r>
+              <a:rPr lang="en-US" sz="2400" dirty="0" err="1">
+                <a:sym typeface="Wingdings" panose="05000000000000000000" pitchFamily="2" charset="2"/>
+              </a:rPr>
+              <a:t>kaust</a:t>
+            </a:r>
+            <a:r>
+              <a:rPr lang="en-US" sz="2400" dirty="0">
+                <a:sym typeface="Wingdings" panose="05000000000000000000" pitchFamily="2" charset="2"/>
+              </a:rPr>
+              <a:t>  Ava fail  Raw</a:t>
+            </a:r>
+          </a:p>
+          <a:p>
+            <a:pPr>
+              <a:lnSpc>
+                <a:spcPct val="150000"/>
+              </a:lnSpc>
+            </a:pPr>
+            <a:r>
+              <a:rPr lang="en-US" sz="2400" dirty="0" err="1">
+                <a:sym typeface="Wingdings" panose="05000000000000000000" pitchFamily="2" charset="2"/>
+              </a:rPr>
+              <a:t>Muuta</a:t>
+            </a:r>
+            <a:r>
+              <a:rPr lang="en-US" sz="2400" dirty="0">
+                <a:sym typeface="Wingdings" panose="05000000000000000000" pitchFamily="2" charset="2"/>
+              </a:rPr>
+              <a:t> </a:t>
+            </a:r>
+            <a:r>
+              <a:rPr lang="en-US" sz="2400" dirty="0" err="1">
+                <a:sym typeface="Wingdings" panose="05000000000000000000" pitchFamily="2" charset="2"/>
+              </a:rPr>
+              <a:t>andmeallikas</a:t>
+            </a:r>
+            <a:r>
+              <a:rPr lang="en-US" sz="2400" dirty="0">
+                <a:sym typeface="Wingdings" panose="05000000000000000000" pitchFamily="2" charset="2"/>
+              </a:rPr>
+              <a:t> Transform Data </a:t>
+            </a:r>
+            <a:r>
+              <a:rPr lang="en-US" sz="2400" dirty="0" err="1">
+                <a:sym typeface="Wingdings" panose="05000000000000000000" pitchFamily="2" charset="2"/>
+              </a:rPr>
+              <a:t>kaudu</a:t>
+            </a:r>
+            <a:r>
+              <a:rPr lang="en-US" sz="2400" dirty="0">
+                <a:sym typeface="Wingdings" panose="05000000000000000000" pitchFamily="2" charset="2"/>
+              </a:rPr>
+              <a:t>:</a:t>
+            </a:r>
+          </a:p>
+          <a:p>
+            <a:pPr lvl="1">
+              <a:lnSpc>
+                <a:spcPct val="150000"/>
+              </a:lnSpc>
+            </a:pPr>
+            <a:r>
+              <a:rPr lang="en-US" sz="2400" dirty="0" err="1">
+                <a:sym typeface="Wingdings" panose="05000000000000000000" pitchFamily="2" charset="2"/>
+              </a:rPr>
+              <a:t>Kopeeri</a:t>
+            </a:r>
+            <a:r>
+              <a:rPr lang="en-US" sz="2400" dirty="0">
+                <a:sym typeface="Wingdings" panose="05000000000000000000" pitchFamily="2" charset="2"/>
+              </a:rPr>
+              <a:t> link “Source” </a:t>
+            </a:r>
+            <a:r>
+              <a:rPr lang="en-US" sz="2400" dirty="0" err="1">
+                <a:sym typeface="Wingdings" panose="05000000000000000000" pitchFamily="2" charset="2"/>
+              </a:rPr>
+              <a:t>sammu</a:t>
+            </a:r>
+            <a:r>
+              <a:rPr lang="en-US" sz="2400" dirty="0">
+                <a:sym typeface="Wingdings" panose="05000000000000000000" pitchFamily="2" charset="2"/>
+              </a:rPr>
+              <a:t> </a:t>
+            </a:r>
+            <a:r>
+              <a:rPr lang="en-US" sz="2400" dirty="0" err="1">
+                <a:sym typeface="Wingdings" panose="05000000000000000000" pitchFamily="2" charset="2"/>
+              </a:rPr>
+              <a:t>jutumärkide</a:t>
+            </a:r>
+            <a:r>
+              <a:rPr lang="en-US" sz="2400" dirty="0">
+                <a:sym typeface="Wingdings" panose="05000000000000000000" pitchFamily="2" charset="2"/>
+              </a:rPr>
+              <a:t> </a:t>
+            </a:r>
+            <a:r>
+              <a:rPr lang="en-US" sz="2400" dirty="0" err="1">
+                <a:sym typeface="Wingdings" panose="05000000000000000000" pitchFamily="2" charset="2"/>
+              </a:rPr>
+              <a:t>vahele</a:t>
+            </a:r>
+            <a:endParaRPr lang="en-US" sz="2400" dirty="0">
+              <a:sym typeface="Wingdings" panose="05000000000000000000" pitchFamily="2" charset="2"/>
+            </a:endParaRPr>
+          </a:p>
+          <a:p>
+            <a:pPr lvl="1">
+              <a:lnSpc>
+                <a:spcPct val="150000"/>
+              </a:lnSpc>
+            </a:pPr>
+            <a:r>
+              <a:rPr lang="en-US" sz="2400" dirty="0" err="1">
+                <a:sym typeface="Wingdings" panose="05000000000000000000" pitchFamily="2" charset="2"/>
+              </a:rPr>
+              <a:t>Muuda</a:t>
+            </a:r>
+            <a:r>
+              <a:rPr lang="en-US" sz="2400" dirty="0">
+                <a:sym typeface="Wingdings" panose="05000000000000000000" pitchFamily="2" charset="2"/>
+              </a:rPr>
+              <a:t> “</a:t>
+            </a:r>
+            <a:r>
+              <a:rPr lang="en-US" sz="2400" dirty="0" err="1">
+                <a:sym typeface="Wingdings" panose="05000000000000000000" pitchFamily="2" charset="2"/>
+              </a:rPr>
+              <a:t>File.Contents</a:t>
+            </a:r>
+            <a:r>
+              <a:rPr lang="en-US" sz="2400" dirty="0">
+                <a:sym typeface="Wingdings" panose="05000000000000000000" pitchFamily="2" charset="2"/>
+              </a:rPr>
+              <a:t>”  “</a:t>
+            </a:r>
+            <a:r>
+              <a:rPr lang="en-US" sz="2400" dirty="0" err="1">
+                <a:sym typeface="Wingdings" panose="05000000000000000000" pitchFamily="2" charset="2"/>
+              </a:rPr>
+              <a:t>Web.Contents</a:t>
+            </a:r>
+            <a:r>
+              <a:rPr lang="en-US" sz="2400" dirty="0">
+                <a:sym typeface="Wingdings" panose="05000000000000000000" pitchFamily="2" charset="2"/>
+              </a:rPr>
+              <a:t>”</a:t>
+            </a:r>
+          </a:p>
+          <a:p>
+            <a:pPr lvl="1"/>
+            <a:endParaRPr lang="et-EE" sz="2400" dirty="0"/>
+          </a:p>
+        </p:txBody>
+      </p:sp>
+    </p:spTree>
+    <p:extLst>
+      <p:ext uri="{BB962C8B-B14F-4D97-AF65-F5344CB8AC3E}">
+        <p14:creationId xmlns:p14="http://schemas.microsoft.com/office/powerpoint/2010/main" val="2411427698"/>
+      </p:ext>
+    </p:extLst>
+  </p:cSld>
+  <p:clrMapOvr>
+    <a:masterClrMapping/>
+  </p:clrMapOvr>
+</p:sld>
+</file>
+
+<file path=ppt/slides/slide5.xml><?xml version="1.0" encoding="utf-8"?>
+<p:sld xmlns:a="http://schemas.openxmlformats.org/drawingml/2006/main" xmlns:r="http://schemas.openxmlformats.org/officeDocument/2006/relationships" xmlns:p="http://schemas.openxmlformats.org/presentationml/2006/main">
+  <p:cSld>
+    <p:spTree>
+      <p:nvGrpSpPr>
         <p:cNvPr id="1" name="">
           <a:extLst>
             <a:ext uri="{FF2B5EF4-FFF2-40B4-BE49-F238E27FC236}">
@@ -29608,7 +30226,7 @@
 </p:sld>
 </file>
 
-<file path=ppt/slides/slide5.xml><?xml version="1.0" encoding="utf-8"?>
+<file path=ppt/slides/slide6.xml><?xml version="1.0" encoding="utf-8"?>
 <p:sld xmlns:a="http://schemas.openxmlformats.org/drawingml/2006/main" xmlns:r="http://schemas.openxmlformats.org/officeDocument/2006/relationships" xmlns:p="http://schemas.openxmlformats.org/presentationml/2006/main">
   <p:cSld>
     <p:spTree>
@@ -29714,59 +30332,62 @@
               </a:lnSpc>
             </a:pPr>
             <a:r>
-              <a:rPr lang="en-US" sz="2000" err="1">
+              <a:rPr lang="en-US" sz="2000" dirty="0" err="1">
                 <a:ea typeface="Inter"/>
               </a:rPr>
               <a:t>Mitmeid</a:t>
             </a:r>
             <a:r>
-              <a:rPr lang="en-US" sz="2000">
+              <a:rPr lang="en-US" sz="2000" dirty="0">
                 <a:ea typeface="Inter"/>
               </a:rPr>
               <a:t> </a:t>
             </a:r>
             <a:r>
-              <a:rPr lang="en-US" sz="2000" err="1">
+              <a:rPr lang="en-US" sz="2000" dirty="0" err="1">
                 <a:ea typeface="Inter"/>
               </a:rPr>
               <a:t>võimalusi</a:t>
             </a:r>
             <a:r>
-              <a:rPr lang="en-US" sz="2000">
+              <a:rPr lang="en-US" sz="2000" dirty="0">
                 <a:ea typeface="Inter"/>
               </a:rPr>
               <a:t> </a:t>
             </a:r>
             <a:r>
-              <a:rPr lang="en-US" sz="2000" err="1">
+              <a:rPr lang="en-US" sz="2000" dirty="0" err="1">
                 <a:ea typeface="Inter"/>
               </a:rPr>
               <a:t>uue</a:t>
             </a:r>
             <a:r>
-              <a:rPr lang="en-US" sz="2000">
+              <a:rPr lang="en-US" sz="2000" dirty="0">
                 <a:ea typeface="Inter"/>
               </a:rPr>
               <a:t> </a:t>
             </a:r>
             <a:r>
-              <a:rPr lang="en-US" sz="2000" err="1">
+              <a:rPr lang="en-US" sz="2000" dirty="0" err="1">
                 <a:ea typeface="Inter"/>
               </a:rPr>
               <a:t>tulba</a:t>
             </a:r>
             <a:r>
-              <a:rPr lang="en-US" sz="2000">
+              <a:rPr lang="en-US" sz="2000" dirty="0">
                 <a:ea typeface="Inter"/>
               </a:rPr>
               <a:t> </a:t>
             </a:r>
             <a:r>
-              <a:rPr lang="en-US" sz="2000" err="1">
+              <a:rPr lang="en-US" sz="2000" dirty="0" err="1">
                 <a:ea typeface="Inter"/>
               </a:rPr>
               <a:t>lisamiseks</a:t>
             </a:r>
+            <a:endParaRPr lang="en-US" sz="2000" dirty="0">
+              <a:ea typeface="Inter"/>
+            </a:endParaRPr>
           </a:p>
           <a:p>
             <a:pPr>
@@ -29775,42 +30396,42 @@
               </a:lnSpc>
             </a:pPr>
             <a:r>
-              <a:rPr lang="en-US" sz="2000">
+              <a:rPr lang="en-US" sz="2000" dirty="0">
                 <a:ea typeface="Inter"/>
               </a:rPr>
               <a:t>Tulp </a:t>
             </a:r>
             <a:r>
-              <a:rPr lang="en-US" sz="2000" err="1">
+              <a:rPr lang="en-US" sz="2000" dirty="0" err="1">
                 <a:ea typeface="Inter"/>
               </a:rPr>
               <a:t>müügiesindaja</a:t>
             </a:r>
             <a:r>
-              <a:rPr lang="en-US" sz="2000">
+              <a:rPr lang="en-US" sz="2000" dirty="0">
                 <a:ea typeface="Inter"/>
               </a:rPr>
               <a:t> </a:t>
             </a:r>
             <a:r>
-              <a:rPr lang="en-US" sz="2000" err="1">
+              <a:rPr lang="en-US" sz="2000" dirty="0" err="1">
                 <a:ea typeface="Inter"/>
               </a:rPr>
               <a:t>eesnime</a:t>
             </a:r>
             <a:r>
-              <a:rPr lang="en-US" sz="2000">
+              <a:rPr lang="en-US" sz="2000" dirty="0">
                 <a:ea typeface="Inter"/>
               </a:rPr>
               <a:t> </a:t>
             </a:r>
             <a:r>
-              <a:rPr lang="en-US" sz="2000" err="1">
+              <a:rPr lang="en-US" sz="2000" dirty="0" err="1">
                 <a:ea typeface="Inter"/>
               </a:rPr>
               <a:t>jaoks</a:t>
             </a:r>
-            <a:endParaRPr lang="en-US" sz="2000">
+            <a:endParaRPr lang="en-US" sz="2000" dirty="0">
               <a:ea typeface="Inter"/>
             </a:endParaRPr>
           </a:p>
@@ -29821,7 +30442,7 @@
               </a:lnSpc>
             </a:pPr>
             <a:r>
-              <a:rPr lang="en-US" sz="2000">
+              <a:rPr lang="en-US" sz="2000" dirty="0">
                 <a:ea typeface="Inter"/>
               </a:rPr>
               <a:t>Column from example</a:t>
@@ -29836,84 +30457,84 @@
               <a:buChar char="§"/>
             </a:pPr>
             <a:r>
-              <a:rPr lang="en-US" sz="2000" err="1">
+              <a:rPr lang="en-US" sz="2000" dirty="0" err="1">
                 <a:ea typeface="Inter"/>
               </a:rPr>
               <a:t>Trükime</a:t>
             </a:r>
             <a:r>
-              <a:rPr lang="en-US" sz="2000">
+              <a:rPr lang="en-US" sz="2000" dirty="0">
                 <a:ea typeface="Inter"/>
               </a:rPr>
               <a:t> </a:t>
             </a:r>
             <a:r>
-              <a:rPr lang="en-US" sz="2000" err="1">
+              <a:rPr lang="en-US" sz="2000" dirty="0" err="1">
                 <a:ea typeface="Inter"/>
               </a:rPr>
               <a:t>esimesse</a:t>
             </a:r>
             <a:r>
-              <a:rPr lang="en-US" sz="2000">
+              <a:rPr lang="en-US" sz="2000" dirty="0">
                 <a:ea typeface="Inter"/>
               </a:rPr>
               <a:t> </a:t>
             </a:r>
             <a:r>
-              <a:rPr lang="en-US" sz="2000" err="1">
+              <a:rPr lang="en-US" sz="2000" dirty="0" err="1">
                 <a:ea typeface="Inter"/>
               </a:rPr>
               <a:t>lahtrisse</a:t>
             </a:r>
             <a:r>
-              <a:rPr lang="en-US" sz="2000">
+              <a:rPr lang="en-US" sz="2000" dirty="0">
                 <a:ea typeface="Inter"/>
               </a:rPr>
               <a:t>, </a:t>
             </a:r>
             <a:r>
-              <a:rPr lang="en-US" sz="2000" err="1">
+              <a:rPr lang="en-US" sz="2000" dirty="0" err="1">
                 <a:ea typeface="Inter"/>
               </a:rPr>
               <a:t>mida</a:t>
             </a:r>
             <a:r>
-              <a:rPr lang="en-US" sz="2000">
+              <a:rPr lang="en-US" sz="2000" dirty="0">
                 <a:ea typeface="Inter"/>
               </a:rPr>
               <a:t> </a:t>
             </a:r>
             <a:r>
-              <a:rPr lang="en-US" sz="2000" err="1">
+              <a:rPr lang="en-US" sz="2000" dirty="0" err="1">
                 <a:ea typeface="Inter"/>
               </a:rPr>
               <a:t>tahame</a:t>
             </a:r>
             <a:r>
-              <a:rPr lang="en-US" sz="2000">
+              <a:rPr lang="en-US" sz="2000" dirty="0">
                 <a:ea typeface="Inter"/>
               </a:rPr>
               <a:t> </a:t>
             </a:r>
             <a:r>
-              <a:rPr lang="en-US" sz="2000" err="1">
+              <a:rPr lang="en-US" sz="2000" dirty="0" err="1">
                 <a:ea typeface="Inter"/>
               </a:rPr>
               <a:t>väärtusena</a:t>
             </a:r>
             <a:r>
-              <a:rPr lang="en-US" sz="2000">
+              <a:rPr lang="en-US" sz="2000" dirty="0">
                 <a:ea typeface="Inter"/>
               </a:rPr>
               <a:t> </a:t>
             </a:r>
             <a:r>
-              <a:rPr lang="en-US" sz="2000" err="1">
+              <a:rPr lang="en-US" sz="2000" dirty="0" err="1">
                 <a:ea typeface="Inter"/>
               </a:rPr>
               <a:t>näha</a:t>
             </a:r>
-            <a:endParaRPr lang="en-US" sz="2000">
+            <a:endParaRPr lang="en-US" sz="2000" dirty="0">
               <a:ea typeface="Inter"/>
             </a:endParaRPr>
           </a:p>
@@ -29926,48 +30547,48 @@
               <a:buChar char="§"/>
             </a:pPr>
             <a:r>
-              <a:rPr lang="en-US" sz="2000" err="1">
+              <a:rPr lang="en-US" sz="2000" dirty="0" err="1">
                 <a:ea typeface="Inter"/>
               </a:rPr>
               <a:t>PowerQuery</a:t>
             </a:r>
             <a:r>
-              <a:rPr lang="en-US" sz="2000">
+              <a:rPr lang="en-US" sz="2000" dirty="0">
                 <a:ea typeface="Inter"/>
               </a:rPr>
               <a:t> </a:t>
             </a:r>
             <a:r>
-              <a:rPr lang="en-US" sz="2000" err="1">
+              <a:rPr lang="en-US" sz="2000" dirty="0" err="1">
                 <a:ea typeface="Inter"/>
               </a:rPr>
               <a:t>loob</a:t>
             </a:r>
             <a:r>
-              <a:rPr lang="en-US" sz="2000">
+              <a:rPr lang="en-US" sz="2000" dirty="0">
                 <a:ea typeface="Inter"/>
               </a:rPr>
               <a:t> </a:t>
             </a:r>
             <a:r>
-              <a:rPr lang="en-US" sz="2000" err="1">
+              <a:rPr lang="en-US" sz="2000" dirty="0" err="1">
                 <a:ea typeface="Inter"/>
               </a:rPr>
               <a:t>automaatselt</a:t>
             </a:r>
             <a:r>
-              <a:rPr lang="en-US" sz="2000">
+              <a:rPr lang="en-US" sz="2000" dirty="0">
                 <a:ea typeface="Inter"/>
               </a:rPr>
               <a:t> </a:t>
             </a:r>
             <a:r>
-              <a:rPr lang="en-US" sz="2000" err="1">
+              <a:rPr lang="en-US" sz="2000" dirty="0" err="1">
                 <a:ea typeface="Inter"/>
               </a:rPr>
               <a:t>valemi</a:t>
             </a:r>
-            <a:endParaRPr lang="en-US" sz="2000">
+            <a:endParaRPr lang="en-US" sz="2000" dirty="0">
               <a:ea typeface="Inter"/>
             </a:endParaRPr>
           </a:p>
@@ -29980,84 +30601,78 @@
               <a:buChar char="§"/>
             </a:pPr>
             <a:r>
-              <a:rPr lang="en-US" sz="2000" err="1">
+              <a:rPr lang="en-US" sz="2000" dirty="0">
                 <a:ea typeface="Inter"/>
               </a:rPr>
-              <a:t>Vaatame</a:t>
-            </a:r>
-            <a:r>
-              <a:rPr lang="en-US" sz="2000">
+              <a:t>Vaatame </a:t>
+            </a:r>
+            <a:r>
+              <a:rPr lang="en-US" sz="2000" dirty="0" err="1">
                 <a:ea typeface="Inter"/>
               </a:rPr>
+              <a:t>üle</a:t>
+            </a:r>
+            <a:r>
+              <a:rPr lang="en-US" sz="2000" dirty="0">
+                <a:ea typeface="Inter"/>
+              </a:rPr>
+              <a:t>, et </a:t>
+            </a:r>
+            <a:r>
+              <a:rPr lang="en-US" sz="2000" dirty="0" err="1">
+                <a:ea typeface="Inter"/>
+              </a:rPr>
+              <a:t>õige</a:t>
+            </a:r>
+            <a:r>
+              <a:rPr lang="en-US" sz="2000" dirty="0">
+                <a:ea typeface="Inter"/>
+              </a:rPr>
               <a:t> </a:t>
             </a:r>
             <a:r>
-              <a:rPr lang="en-US" sz="2000" err="1">
+              <a:rPr lang="en-US" sz="2000" dirty="0" err="1">
                 <a:ea typeface="Inter"/>
               </a:rPr>
-              <a:t>üle</a:t>
-            </a:r>
-            <a:r>
-              <a:rPr lang="en-US" sz="2000">
+              <a:t>loogika</a:t>
+            </a:r>
+            <a:r>
+              <a:rPr lang="en-US" sz="2000" dirty="0">
                 <a:ea typeface="Inter"/>
               </a:rPr>
-              <a:t>, et </a:t>
-            </a:r>
-            <a:r>
-              <a:rPr lang="en-US" sz="2000" err="1">
+              <a:t> ja </a:t>
+            </a:r>
+            <a:r>
+              <a:rPr lang="en-US" sz="2000" dirty="0" err="1">
                 <a:ea typeface="Inter"/>
               </a:rPr>
-              <a:t>õige</a:t>
-            </a:r>
-            <a:r>
-              <a:rPr lang="en-US" sz="2000">
+              <a:t>rakendame</a:t>
+            </a:r>
+            <a:r>
+              <a:rPr lang="en-US" sz="2000" dirty="0">
                 <a:ea typeface="Inter"/>
               </a:rPr>
               <a:t> </a:t>
             </a:r>
             <a:r>
-              <a:rPr lang="en-US" sz="2000" err="1">
+              <a:rPr lang="en-US" sz="2000" dirty="0" err="1">
                 <a:ea typeface="Inter"/>
               </a:rPr>
-              <a:t>loogika</a:t>
-            </a:r>
-            <a:r>
-              <a:rPr lang="en-US" sz="2000">
+              <a:t>kõigile</a:t>
+            </a:r>
+            <a:r>
+              <a:rPr lang="en-US" sz="2000" dirty="0">
                 <a:ea typeface="Inter"/>
               </a:rPr>
-              <a:t> ja </a:t>
-            </a:r>
-            <a:r>
-              <a:rPr lang="en-US" sz="2000" err="1">
+              <a:t> </a:t>
+            </a:r>
+            <a:r>
+              <a:rPr lang="en-US" sz="2000" dirty="0" err="1">
                 <a:ea typeface="Inter"/>
               </a:rPr>
-              <a:t>rakendame</a:t>
-            </a:r>
-            <a:r>
-              <a:rPr lang="en-US" sz="2000">
-                <a:ea typeface="Inter"/>
-              </a:rPr>
-              <a:t> </a:t>
-            </a:r>
-            <a:r>
-              <a:rPr lang="en-US" sz="2000" err="1">
-                <a:ea typeface="Inter"/>
-              </a:rPr>
-              <a:t>kõigile</a:t>
-            </a:r>
-            <a:r>
-              <a:rPr lang="en-US" sz="2000">
-                <a:ea typeface="Inter"/>
-              </a:rPr>
-              <a:t> </a:t>
-            </a:r>
-            <a:r>
-              <a:rPr lang="en-US" sz="2000" err="1">
-                <a:ea typeface="Inter"/>
-              </a:rPr>
               <a:t>ridadele</a:t>
             </a:r>
-            <a:endParaRPr lang="en-US" sz="2000">
+            <a:endParaRPr lang="en-US" sz="2000" dirty="0">
               <a:ea typeface="Inter"/>
             </a:endParaRPr>
           </a:p>
@@ -30070,124 +30685,56 @@
               <a:buChar char="§"/>
             </a:pPr>
             <a:r>
-              <a:rPr lang="en-US" sz="2000" err="1">
+              <a:rPr lang="en-US" sz="2000" dirty="0">
                 <a:ea typeface="Inter"/>
               </a:rPr>
-              <a:t>Vaatame</a:t>
-            </a:r>
-            <a:r>
-              <a:rPr lang="en-US" sz="2000">
+              <a:t>Vaatame </a:t>
+            </a:r>
+            <a:r>
+              <a:rPr lang="en-US" sz="2000" dirty="0" err="1">
                 <a:ea typeface="Inter"/>
               </a:rPr>
+              <a:t>üle</a:t>
+            </a:r>
+            <a:r>
+              <a:rPr lang="en-US" sz="2000" dirty="0">
+                <a:ea typeface="Inter"/>
+              </a:rPr>
+              <a:t>, kas </a:t>
+            </a:r>
+            <a:r>
+              <a:rPr lang="en-US" sz="2000" dirty="0" err="1">
+                <a:ea typeface="Inter"/>
+              </a:rPr>
+              <a:t>tulid</a:t>
+            </a:r>
+            <a:r>
+              <a:rPr lang="en-US" sz="2000" dirty="0">
+                <a:ea typeface="Inter"/>
+              </a:rPr>
               <a:t> </a:t>
             </a:r>
             <a:r>
-              <a:rPr lang="en-US" sz="2000" err="1">
+              <a:rPr lang="en-US" sz="2000" dirty="0" err="1">
                 <a:ea typeface="Inter"/>
               </a:rPr>
-              <a:t>üle</a:t>
-            </a:r>
-            <a:r>
-              <a:rPr lang="en-US" sz="2000">
+              <a:t>korrektsed</a:t>
+            </a:r>
+            <a:r>
+              <a:rPr lang="en-US" sz="2000" dirty="0">
                 <a:ea typeface="Inter"/>
               </a:rPr>
-              <a:t>, kas </a:t>
-            </a:r>
-            <a:r>
-              <a:rPr lang="en-US" sz="2000" err="1">
+              <a:t> </a:t>
+            </a:r>
+            <a:r>
+              <a:rPr lang="en-US" sz="2000" dirty="0" err="1">
                 <a:ea typeface="Inter"/>
               </a:rPr>
-              <a:t>tulid</a:t>
-            </a:r>
-            <a:r>
-              <a:rPr lang="en-US" sz="2000">
-                <a:ea typeface="Inter"/>
-              </a:rPr>
-              <a:t> </a:t>
-            </a:r>
-            <a:r>
-              <a:rPr lang="en-US" sz="2000" err="1">
-                <a:ea typeface="Inter"/>
-              </a:rPr>
-              <a:t>korrektsed</a:t>
-            </a:r>
-            <a:r>
-              <a:rPr lang="en-US" sz="2000">
-                <a:ea typeface="Inter"/>
-              </a:rPr>
-              <a:t> </a:t>
-            </a:r>
-            <a:r>
-              <a:rPr lang="en-US" sz="2000" err="1">
-                <a:ea typeface="Inter"/>
-              </a:rPr>
               <a:t>väärtused</a:t>
             </a:r>
-            <a:endParaRPr lang="en-US" sz="2000">
+            <a:endParaRPr lang="en-US" sz="2000" dirty="0">
               <a:ea typeface="Inter"/>
             </a:endParaRPr>
-          </a:p>
-          <a:p>
-            <a:pPr>
-              <a:lnSpc>
-                <a:spcPct val="150000"/>
-              </a:lnSpc>
-              <a:buClr>
-                <a:srgbClr val="121212"/>
-              </a:buClr>
-            </a:pPr>
-            <a:r>
-              <a:rPr lang="en-US" sz="2000">
-                <a:ea typeface="Inter"/>
-              </a:rPr>
-              <a:t>Tulp </a:t>
-            </a:r>
-            <a:r>
-              <a:rPr lang="en-US" sz="2000" err="1">
-                <a:ea typeface="Inter"/>
-              </a:rPr>
-              <a:t>müügiesindaja</a:t>
-            </a:r>
-            <a:r>
-              <a:rPr lang="en-US" sz="2000">
-                <a:ea typeface="Inter"/>
-              </a:rPr>
-              <a:t> </a:t>
-            </a:r>
-            <a:r>
-              <a:rPr lang="en-US" sz="2000" err="1">
-                <a:ea typeface="Inter"/>
-              </a:rPr>
-              <a:t>tiimi</a:t>
-            </a:r>
-            <a:r>
-              <a:rPr lang="en-US" sz="2000">
-                <a:ea typeface="Inter"/>
-              </a:rPr>
-              <a:t> </a:t>
-            </a:r>
-            <a:r>
-              <a:rPr lang="en-US" sz="2000" err="1">
-                <a:ea typeface="Inter"/>
-              </a:rPr>
-              <a:t>jaoks</a:t>
-            </a:r>
-            <a:endParaRPr lang="en-US" sz="2000">
-              <a:ea typeface="Inter"/>
-            </a:endParaRPr>
-          </a:p>
-          <a:p>
-            <a:pPr lvl="1">
-              <a:lnSpc>
-                <a:spcPct val="150000"/>
-              </a:lnSpc>
-            </a:pPr>
-            <a:r>
-              <a:rPr lang="en-US" sz="2000">
-                <a:ea typeface="Inter"/>
-              </a:rPr>
-              <a:t>Conditional column</a:t>
-            </a:r>
           </a:p>
         </p:txBody>
       </p:sp>
@@ -30462,86 +31009,6 @@
                       </p:childTnLst>
                     </p:cTn>
                   </p:par>
-                  <p:par>
-                    <p:cTn id="21" fill="hold">
-                      <p:stCondLst>
-                        <p:cond delay="indefinite"/>
-                      </p:stCondLst>
-                      <p:childTnLst>
-                        <p:par>
-                          <p:cTn id="22" fill="hold">
-                            <p:stCondLst>
-                              <p:cond delay="0"/>
-                            </p:stCondLst>
-                            <p:childTnLst>
-                              <p:par>
-                                <p:cTn id="23" presetID="1" presetClass="entr" presetSubtype="0" fill="hold" grpId="0" nodeType="clickEffect">
-                                  <p:stCondLst>
-                                    <p:cond delay="0"/>
-                                  </p:stCondLst>
-                                  <p:childTnLst>
-                                    <p:set>
-                                      <p:cBhvr>
-                                        <p:cTn id="24" dur="1" fill="hold">
-                                          <p:stCondLst>
-                                            <p:cond delay="0"/>
-                                          </p:stCondLst>
-                                        </p:cTn>
-                                        <p:tgtEl>
-                                          <p:spTgt spid="3">
-                                            <p:txEl>
-                                              <p:pRg st="7" end="7"/>
-                                            </p:txEl>
-                                          </p:spTgt>
-                                        </p:tgtEl>
-                                        <p:attrNameLst>
-                                          <p:attrName>style.visibility</p:attrName>
-                                        </p:attrNameLst>
-                                      </p:cBhvr>
-                                      <p:to>
-                                        <p:strVal val="visible"/>
-                                      </p:to>
-                                    </p:set>
-                                  </p:childTnLst>
-                                </p:cTn>
-                              </p:par>
-                              <p:par>
-                                <p:cTn id="25" presetID="1" presetClass="entr" presetSubtype="0" fill="hold" grpId="0" nodeType="withEffect">
-                                  <p:stCondLst>
-                                    <p:cond delay="0"/>
-                                  </p:stCondLst>
-                                  <p:childTnLst>
-                                    <p:set>
-                                      <p:cBhvr>
-                                        <p:cTn id="26" dur="1" fill="hold">
-                                          <p:stCondLst>
-                                            <p:cond delay="0"/>
-                                          </p:stCondLst>
-                                        </p:cTn>
-                                        <p:tgtEl>
-                                          <p:spTgt spid="3">
-                                            <p:txEl>
-                                              <p:pRg st="8" end="8"/>
-                                            </p:txEl>
-                                          </p:spTgt>
-                                        </p:tgtEl>
-                                        <p:attrNameLst>
-                                          <p:attrName>style.visibility</p:attrName>
-                                        </p:attrNameLst>
-                                      </p:cBhvr>
-                                      <p:to>
-                                        <p:strVal val="visible"/>
-                                      </p:to>
-                                    </p:set>
-                                  </p:childTnLst>
-                                </p:cTn>
-                              </p:par>
-                            </p:childTnLst>
-                          </p:cTn>
-                        </p:par>
-                      </p:childTnLst>
-                    </p:cTn>
-                  </p:par>
                 </p:childTnLst>
               </p:cTn>
               <p:prevCondLst>
@@ -30570,7 +31037,7 @@
 </p:sld>
 </file>
 
-<file path=ppt/slides/slide6.xml><?xml version="1.0" encoding="utf-8"?>
+<file path=ppt/slides/slide7.xml><?xml version="1.0" encoding="utf-8"?>
 <p:sld xmlns:a="http://schemas.openxmlformats.org/drawingml/2006/main" xmlns:r="http://schemas.openxmlformats.org/officeDocument/2006/relationships" xmlns:p="http://schemas.openxmlformats.org/presentationml/2006/main">
   <p:cSld>
     <p:spTree>
@@ -30683,7 +31150,7 @@
 </p:sld>
 </file>
 
-<file path=ppt/slides/slide7.xml><?xml version="1.0" encoding="utf-8"?>
+<file path=ppt/slides/slide8.xml><?xml version="1.0" encoding="utf-8"?>
 <p:sld xmlns:a="http://schemas.openxmlformats.org/drawingml/2006/main" xmlns:r="http://schemas.openxmlformats.org/officeDocument/2006/relationships" xmlns:p="http://schemas.openxmlformats.org/presentationml/2006/main">
   <p:cSld>
     <p:spTree>
@@ -31865,7 +32332,7 @@
 </p:sld>
 </file>
 
-<file path=ppt/slides/slide8.xml><?xml version="1.0" encoding="utf-8"?>
+<file path=ppt/slides/slide9.xml><?xml version="1.0" encoding="utf-8"?>
 <p:sld xmlns:a="http://schemas.openxmlformats.org/drawingml/2006/main" xmlns:r="http://schemas.openxmlformats.org/officeDocument/2006/relationships" xmlns:p="http://schemas.openxmlformats.org/presentationml/2006/main">
   <p:cSld>
     <p:spTree>
@@ -32043,257 +32510,6 @@
     <p:extLst>
       <p:ext uri="{BB962C8B-B14F-4D97-AF65-F5344CB8AC3E}">
         <p14:creationId xmlns:p14="http://schemas.microsoft.com/office/powerpoint/2010/main" val="645323131"/>
-      </p:ext>
-    </p:extLst>
-  </p:cSld>
-  <p:clrMapOvr>
-    <a:masterClrMapping/>
-  </p:clrMapOvr>
-</p:sld>
-</file>
-
-<file path=ppt/slides/slide9.xml><?xml version="1.0" encoding="utf-8"?>
-<p:sld xmlns:a="http://schemas.openxmlformats.org/drawingml/2006/main" xmlns:r="http://schemas.openxmlformats.org/officeDocument/2006/relationships" xmlns:p="http://schemas.openxmlformats.org/presentationml/2006/main">
-  <p:cSld>
-    <p:spTree>
-      <p:nvGrpSpPr>
-        <p:cNvPr id="1" name=""/>
-        <p:cNvGrpSpPr/>
-        <p:nvPr/>
-      </p:nvGrpSpPr>
-      <p:grpSpPr>
-        <a:xfrm>
-          <a:off x="0" y="0"/>
-          <a:ext cx="0" cy="0"/>
-          <a:chOff x="0" y="0"/>
-          <a:chExt cx="0" cy="0"/>
-        </a:xfrm>
-      </p:grpSpPr>
-      <p:sp>
-        <p:nvSpPr>
-          <p:cNvPr id="2" name="Title 1">
-            <a:extLst>
-              <a:ext uri="{FF2B5EF4-FFF2-40B4-BE49-F238E27FC236}">
-                <a16:creationId xmlns:a16="http://schemas.microsoft.com/office/drawing/2014/main" id="{6CC70693-807C-0582-E2F8-D70C2E33A16B}"/>
-              </a:ext>
-            </a:extLst>
-          </p:cNvPr>
-          <p:cNvSpPr>
-            <a:spLocks noGrp="1"/>
-          </p:cNvSpPr>
-          <p:nvPr>
-            <p:ph type="ctrTitle"/>
-          </p:nvPr>
-        </p:nvSpPr>
-        <p:spPr/>
-        <p:txBody>
-          <a:bodyPr/>
-          <a:lstStyle/>
-          <a:p>
-            <a:r>
-              <a:rPr lang="en-US"/>
-              <a:t>Kumb </a:t>
-            </a:r>
-            <a:r>
-              <a:rPr lang="en-US" err="1"/>
-              <a:t>visuaal</a:t>
-            </a:r>
-            <a:r>
-              <a:rPr lang="en-US"/>
-              <a:t> on  </a:t>
-            </a:r>
-            <a:r>
-              <a:rPr lang="en-US" err="1"/>
-              <a:t>parem</a:t>
-            </a:r>
-            <a:r>
-              <a:rPr lang="en-US"/>
-              <a:t> – </a:t>
-            </a:r>
-            <a:r>
-              <a:rPr lang="en-US" err="1"/>
-              <a:t>miks</a:t>
-            </a:r>
-            <a:r>
-              <a:rPr lang="en-US"/>
-              <a:t>?</a:t>
-            </a:r>
-          </a:p>
-        </p:txBody>
-      </p:sp>
-      <p:sp>
-        <p:nvSpPr>
-          <p:cNvPr id="3" name="Content Placeholder 2">
-            <a:extLst>
-              <a:ext uri="{FF2B5EF4-FFF2-40B4-BE49-F238E27FC236}">
-                <a16:creationId xmlns:a16="http://schemas.microsoft.com/office/drawing/2014/main" id="{628CD13E-E6C1-F13D-85FB-D41B6EB0BA6C}"/>
-              </a:ext>
-            </a:extLst>
-          </p:cNvPr>
-          <p:cNvSpPr>
-            <a:spLocks noGrp="1"/>
-          </p:cNvSpPr>
-          <p:nvPr>
-            <p:ph sz="quarter" idx="10"/>
-          </p:nvPr>
-        </p:nvSpPr>
-        <p:spPr/>
-        <p:txBody>
-          <a:bodyPr/>
-          <a:lstStyle/>
-          <a:p>
-            <a:endParaRPr lang="en-US"/>
-          </a:p>
-        </p:txBody>
-      </p:sp>
-      <p:sp>
-        <p:nvSpPr>
-          <p:cNvPr id="4" name="Content Placeholder 3">
-            <a:extLst>
-              <a:ext uri="{FF2B5EF4-FFF2-40B4-BE49-F238E27FC236}">
-                <a16:creationId xmlns:a16="http://schemas.microsoft.com/office/drawing/2014/main" id="{DF34A489-80BB-9D68-E783-307EEB75483F}"/>
-              </a:ext>
-            </a:extLst>
-          </p:cNvPr>
-          <p:cNvSpPr>
-            <a:spLocks noGrp="1"/>
-          </p:cNvSpPr>
-          <p:nvPr>
-            <p:ph sz="quarter" idx="11"/>
-          </p:nvPr>
-        </p:nvSpPr>
-        <p:spPr/>
-        <p:txBody>
-          <a:bodyPr/>
-          <a:lstStyle/>
-          <a:p>
-            <a:endParaRPr lang="en-US"/>
-          </a:p>
-        </p:txBody>
-      </p:sp>
-      <p:pic>
-        <p:nvPicPr>
-          <p:cNvPr id="6" name="Content Placeholder 4" descr="A graph of co2 emissions&#10;&#10;AI-generated content may be incorrect.">
-            <a:extLst>
-              <a:ext uri="{FF2B5EF4-FFF2-40B4-BE49-F238E27FC236}">
-                <a16:creationId xmlns:a16="http://schemas.microsoft.com/office/drawing/2014/main" id="{42F28992-9372-2820-2AA9-A223EC4F3979}"/>
-              </a:ext>
-            </a:extLst>
-          </p:cNvPr>
-          <p:cNvPicPr>
-            <a:picLocks noChangeAspect="1"/>
-          </p:cNvPicPr>
-          <p:nvPr/>
-        </p:nvPicPr>
-        <p:blipFill>
-          <a:blip r:embed="rId2"/>
-          <a:stretch>
-            <a:fillRect/>
-          </a:stretch>
-        </p:blipFill>
-        <p:spPr>
-          <a:xfrm>
-            <a:off x="792279" y="1266546"/>
-            <a:ext cx="5181752" cy="4159478"/>
-          </a:xfrm>
-          <a:prstGeom prst="rect">
-            <a:avLst/>
-          </a:prstGeom>
-        </p:spPr>
-      </p:pic>
-      <p:pic>
-        <p:nvPicPr>
-          <p:cNvPr id="8" name="Content Placeholder 5" descr="A graph with a red bar and gray bars&#10;&#10;AI-generated content may be incorrect.">
-            <a:extLst>
-              <a:ext uri="{FF2B5EF4-FFF2-40B4-BE49-F238E27FC236}">
-                <a16:creationId xmlns:a16="http://schemas.microsoft.com/office/drawing/2014/main" id="{FDC5B212-1535-8D2B-FD2B-6429917814AB}"/>
-              </a:ext>
-            </a:extLst>
-          </p:cNvPr>
-          <p:cNvPicPr>
-            <a:picLocks noChangeAspect="1"/>
-          </p:cNvPicPr>
-          <p:nvPr/>
-        </p:nvPicPr>
-        <p:blipFill>
-          <a:blip r:embed="rId3"/>
-          <a:stretch>
-            <a:fillRect/>
-          </a:stretch>
-        </p:blipFill>
-        <p:spPr>
-          <a:xfrm>
-            <a:off x="6205849" y="1268413"/>
-            <a:ext cx="5371682" cy="4143787"/>
-          </a:xfrm>
-          <a:prstGeom prst="rect">
-            <a:avLst/>
-          </a:prstGeom>
-        </p:spPr>
-      </p:pic>
-      <p:sp>
-        <p:nvSpPr>
-          <p:cNvPr id="5" name="TextBox 4">
-            <a:extLst>
-              <a:ext uri="{FF2B5EF4-FFF2-40B4-BE49-F238E27FC236}">
-                <a16:creationId xmlns:a16="http://schemas.microsoft.com/office/drawing/2014/main" id="{5A9BEFD3-193A-7B44-10AC-572FE16CDF23}"/>
-              </a:ext>
-            </a:extLst>
-          </p:cNvPr>
-          <p:cNvSpPr txBox="1"/>
-          <p:nvPr/>
-        </p:nvSpPr>
-        <p:spPr>
-          <a:xfrm>
-            <a:off x="631795" y="6124716"/>
-            <a:ext cx="8577018" cy="276999"/>
-          </a:xfrm>
-          <a:prstGeom prst="rect">
-            <a:avLst/>
-          </a:prstGeom>
-          <a:noFill/>
-        </p:spPr>
-        <p:txBody>
-          <a:bodyPr rot="0" spcFirstLastPara="0" vertOverflow="overflow" horzOverflow="overflow" vert="horz" wrap="square" lIns="91440" tIns="45720" rIns="91440" bIns="45720" numCol="1" spcCol="0" rtlCol="0" fromWordArt="0" anchor="t" anchorCtr="0" forceAA="0" compatLnSpc="1">
-            <a:prstTxWarp prst="textNoShape">
-              <a:avLst/>
-            </a:prstTxWarp>
-            <a:spAutoFit/>
-          </a:bodyPr>
-          <a:lstStyle/>
-          <a:p>
-            <a:r>
-              <a:rPr lang="en-US" sz="1200">
-                <a:ea typeface="Inter"/>
-              </a:rPr>
-              <a:t>Allikas: </a:t>
-            </a:r>
-            <a:r>
-              <a:rPr lang="en-US" sz="1200">
-                <a:ea typeface="Inter"/>
-                <a:hlinkClick r:id="rId4"/>
-              </a:rPr>
-              <a:t>Rand Owens. </a:t>
-            </a:r>
-            <a:r>
-              <a:rPr lang="en-US" sz="1200">
-                <a:solidFill>
-                  <a:srgbClr val="000000"/>
-                </a:solidFill>
-                <a:hlinkClick r:id="rId4"/>
-              </a:rPr>
-              <a:t>10 Good and Bad Examples of Data Visualization in 2024.</a:t>
-            </a:r>
-            <a:endParaRPr lang="en-US" sz="1200">
-              <a:ea typeface="Inter"/>
-            </a:endParaRPr>
-          </a:p>
-        </p:txBody>
-      </p:sp>
-    </p:spTree>
-    <p:extLst>
-      <p:ext uri="{BB962C8B-B14F-4D97-AF65-F5344CB8AC3E}">
-        <p14:creationId xmlns:p14="http://schemas.microsoft.com/office/powerpoint/2010/main" val="473110062"/>
       </p:ext>
     </p:extLst>
   </p:cSld>
@@ -33095,18 +33311,18 @@
 </file>
 
 <file path=customXml/item1.xml><?xml version="1.0" encoding="utf-8"?>
-<p:properties xmlns:p="http://schemas.microsoft.com/office/2006/metadata/properties" xmlns:xsi="http://www.w3.org/2001/XMLSchema-instance" xmlns:pc="http://schemas.microsoft.com/office/infopath/2007/PartnerControls">
-  <documentManagement/>
-</p:properties>
-</file>
-
-<file path=customXml/item2.xml><?xml version="1.0" encoding="utf-8"?>
 <?mso-contentType ?>
 <FormTemplates xmlns="http://schemas.microsoft.com/sharepoint/v3/contenttype/forms">
   <Display>DocumentLibraryForm</Display>
   <Edit>DocumentLibraryForm</Edit>
   <New>DocumentLibraryForm</New>
 </FormTemplates>
+</file>
+
+<file path=customXml/item2.xml><?xml version="1.0" encoding="utf-8"?>
+<p:properties xmlns:p="http://schemas.microsoft.com/office/2006/metadata/properties" xmlns:xsi="http://www.w3.org/2001/XMLSchema-instance" xmlns:pc="http://schemas.microsoft.com/office/infopath/2007/PartnerControls">
+  <documentManagement/>
+</p:properties>
 </file>
 
 <file path=customXml/item3.xml><?xml version="1.0" encoding="utf-8"?>
@@ -33278,18 +33494,18 @@
 </file>
 
 <file path=customXml/itemProps1.xml><?xml version="1.0" encoding="utf-8"?>
-<ds:datastoreItem xmlns:ds="http://schemas.openxmlformats.org/officeDocument/2006/customXml" ds:itemID="{5BDF4908-A52A-47DD-A794-6E02D71942FC}">
+<ds:datastoreItem xmlns:ds="http://schemas.openxmlformats.org/officeDocument/2006/customXml" ds:itemID="{9DC439CA-6F1C-4005-ACA6-A52E04DEE0A7}">
   <ds:schemaRefs>
-    <ds:schemaRef ds:uri="http://schemas.microsoft.com/office/2006/metadata/properties"/>
-    <ds:schemaRef ds:uri="http://schemas.microsoft.com/office/infopath/2007/PartnerControls"/>
+    <ds:schemaRef ds:uri="http://schemas.microsoft.com/sharepoint/v3/contenttype/forms"/>
   </ds:schemaRefs>
 </ds:datastoreItem>
 </file>
 
 <file path=customXml/itemProps2.xml><?xml version="1.0" encoding="utf-8"?>
-<ds:datastoreItem xmlns:ds="http://schemas.openxmlformats.org/officeDocument/2006/customXml" ds:itemID="{9DC439CA-6F1C-4005-ACA6-A52E04DEE0A7}">
+<ds:datastoreItem xmlns:ds="http://schemas.openxmlformats.org/officeDocument/2006/customXml" ds:itemID="{5BDF4908-A52A-47DD-A794-6E02D71942FC}">
   <ds:schemaRefs>
-    <ds:schemaRef ds:uri="http://schemas.microsoft.com/sharepoint/v3/contenttype/forms"/>
+    <ds:schemaRef ds:uri="http://schemas.microsoft.com/office/2006/metadata/properties"/>
+    <ds:schemaRef ds:uri="http://schemas.microsoft.com/office/infopath/2007/PartnerControls"/>
   </ds:schemaRefs>
 </ds:datastoreItem>
 </file>

--- a/Day3/3-paev-andmetarkus-esitlus.pptx
+++ b/Day3/3-paev-andmetarkus-esitlus.pptx
@@ -173,7 +173,7 @@
   <pc:docChgLst>
     <pc:chgData name="Virve Räni" userId="161a7437-7ef4-49ec-91bf-54882f313dfe" providerId="ADAL" clId="{6D754EED-65AA-4A21-B175-6769012CF487}"/>
     <pc:docChg chg="custSel addSld modSld sldOrd">
-      <pc:chgData name="Virve Räni" userId="161a7437-7ef4-49ec-91bf-54882f313dfe" providerId="ADAL" clId="{6D754EED-65AA-4A21-B175-6769012CF487}" dt="2026-03-31T14:38:11.727" v="542" actId="20577"/>
+      <pc:chgData name="Virve Räni" userId="161a7437-7ef4-49ec-91bf-54882f313dfe" providerId="ADAL" clId="{6D754EED-65AA-4A21-B175-6769012CF487}" dt="2026-04-01T12:11:11.925" v="569" actId="20577"/>
       <pc:docMkLst>
         <pc:docMk/>
       </pc:docMkLst>
@@ -196,6 +196,21 @@
             <pc:docMk/>
             <pc:sldMk cId="2033048184" sldId="449"/>
             <ac:spMk id="3" creationId="{5724D9C5-3791-BF32-C6DA-2B258420122F}"/>
+          </ac:spMkLst>
+        </pc:spChg>
+      </pc:sldChg>
+      <pc:sldChg chg="modSp mod">
+        <pc:chgData name="Virve Räni" userId="161a7437-7ef4-49ec-91bf-54882f313dfe" providerId="ADAL" clId="{6D754EED-65AA-4A21-B175-6769012CF487}" dt="2026-04-01T12:11:11.925" v="569" actId="20577"/>
+        <pc:sldMkLst>
+          <pc:docMk/>
+          <pc:sldMk cId="1426166856" sldId="480"/>
+        </pc:sldMkLst>
+        <pc:spChg chg="mod">
+          <ac:chgData name="Virve Räni" userId="161a7437-7ef4-49ec-91bf-54882f313dfe" providerId="ADAL" clId="{6D754EED-65AA-4A21-B175-6769012CF487}" dt="2026-04-01T12:11:11.925" v="569" actId="20577"/>
+          <ac:spMkLst>
+            <pc:docMk/>
+            <pc:sldMk cId="1426166856" sldId="480"/>
+            <ac:spMk id="3" creationId="{FE461742-DF25-4363-F470-8E384FA03D54}"/>
           </ac:spMkLst>
         </pc:spChg>
       </pc:sldChg>
@@ -321,7 +336,7 @@
           <a:p>
             <a:fld id="{F9D2AD6E-DEDD-49A0-A4BE-7A081A9112DA}" type="datetimeFigureOut">
               <a:rPr lang="en-US" smtClean="0"/>
-              <a:t>3/31/2026</a:t>
+              <a:t>4/1/2026</a:t>
             </a:fld>
             <a:endParaRPr lang="en-US"/>
           </a:p>
@@ -497,7 +512,7 @@
           </a:lstStyle>
           <a:p>
             <a:fld id="{2AF9C1A6-4321-41FA-B001-4140F0E2457F}" type="datetimeFigureOut">
-              <a:t>31.03.2026</a:t>
+              <a:t>01.04.2026</a:t>
             </a:fld>
             <a:endParaRPr lang="en-US"/>
           </a:p>
@@ -12261,7 +12276,7 @@
           <a:p>
             <a:fld id="{DE840A40-73C8-4048-8140-49F5D65BB431}" type="datetimeFigureOut">
               <a:rPr lang="et-EE" smtClean="0"/>
-              <a:t>31.03.2026</a:t>
+              <a:t>01.04.2026</a:t>
             </a:fld>
             <a:endParaRPr lang="et-EE"/>
           </a:p>
@@ -28406,7 +28421,7 @@
               </a:lnSpc>
             </a:pPr>
             <a:r>
-              <a:rPr lang="en-US" sz="2400">
+              <a:rPr lang="en-US" sz="2400" dirty="0">
                 <a:solidFill>
                   <a:srgbClr val="000000"/>
                 </a:solidFill>
@@ -28415,7 +28430,7 @@
               <a:t>Mida </a:t>
             </a:r>
             <a:r>
-              <a:rPr lang="en-US" sz="2400" err="1">
+              <a:rPr lang="en-US" sz="2400" dirty="0" err="1">
                 <a:solidFill>
                   <a:srgbClr val="000000"/>
                 </a:solidFill>
@@ -28424,7 +28439,7 @@
               <a:t>saame</a:t>
             </a:r>
             <a:r>
-              <a:rPr lang="en-US" sz="2400">
+              <a:rPr lang="en-US" sz="2400" dirty="0">
                 <a:solidFill>
                   <a:srgbClr val="000000"/>
                 </a:solidFill>
@@ -28433,7 +28448,7 @@
               <a:t> </a:t>
             </a:r>
             <a:r>
-              <a:rPr lang="en-US" sz="2400" err="1">
+              <a:rPr lang="en-US" sz="2400" dirty="0" err="1">
                 <a:solidFill>
                   <a:srgbClr val="000000"/>
                 </a:solidFill>
@@ -28442,7 +28457,7 @@
               <a:t>järeldada</a:t>
             </a:r>
             <a:r>
-              <a:rPr lang="en-US" sz="2400">
+              <a:rPr lang="en-US" sz="2400" dirty="0">
                 <a:solidFill>
                   <a:srgbClr val="000000"/>
                 </a:solidFill>
@@ -28451,7 +28466,7 @@
               <a:t> </a:t>
             </a:r>
             <a:r>
-              <a:rPr lang="en-US" sz="2400" err="1">
+              <a:rPr lang="en-US" sz="2400" dirty="0" err="1">
                 <a:solidFill>
                   <a:srgbClr val="000000"/>
                 </a:solidFill>
@@ -28460,7 +28475,7 @@
               <a:t>oma</a:t>
             </a:r>
             <a:r>
-              <a:rPr lang="en-US" sz="2400">
+              <a:rPr lang="en-US" sz="2400" dirty="0">
                 <a:solidFill>
                   <a:srgbClr val="000000"/>
                 </a:solidFill>
@@ -28469,7 +28484,7 @@
               <a:t> </a:t>
             </a:r>
             <a:r>
-              <a:rPr lang="en-US" sz="2400" err="1">
+              <a:rPr lang="en-US" sz="2400" dirty="0" err="1">
                 <a:solidFill>
                   <a:srgbClr val="000000"/>
                 </a:solidFill>
@@ -28478,7 +28493,7 @@
               <a:t>müügiandmestiku</a:t>
             </a:r>
             <a:r>
-              <a:rPr lang="en-US" sz="2400">
+              <a:rPr lang="en-US" sz="2400" dirty="0">
                 <a:solidFill>
                   <a:srgbClr val="000000"/>
                 </a:solidFill>
@@ -28487,7 +28502,7 @@
               <a:t> </a:t>
             </a:r>
             <a:r>
-              <a:rPr lang="en-US" sz="2400" err="1">
+              <a:rPr lang="en-US" sz="2400" dirty="0" err="1">
                 <a:solidFill>
                   <a:srgbClr val="000000"/>
                 </a:solidFill>
@@ -28496,7 +28511,7 @@
               <a:t>analüüsist</a:t>
             </a:r>
             <a:r>
-              <a:rPr lang="en-US" sz="2400">
+              <a:rPr lang="en-US" sz="2400" dirty="0">
                 <a:solidFill>
                   <a:srgbClr val="000000"/>
                 </a:solidFill>
@@ -28504,7 +28519,7 @@
               </a:rPr>
               <a:t>?</a:t>
             </a:r>
-            <a:endParaRPr lang="en-US" err="1">
+            <a:endParaRPr lang="en-US" dirty="0">
               <a:solidFill>
                 <a:srgbClr val="121212"/>
               </a:solidFill>
@@ -28517,7 +28532,7 @@
               </a:lnSpc>
             </a:pPr>
             <a:r>
-              <a:rPr lang="en-US" sz="2400" err="1">
+              <a:rPr lang="en-US" sz="2400" dirty="0" err="1">
                 <a:solidFill>
                   <a:srgbClr val="000000"/>
                 </a:solidFill>
@@ -28526,7 +28541,7 @@
               <a:t>Kuidas</a:t>
             </a:r>
             <a:r>
-              <a:rPr lang="en-US" sz="2400">
+              <a:rPr lang="en-US" sz="2400" dirty="0">
                 <a:solidFill>
                   <a:srgbClr val="000000"/>
                 </a:solidFill>
@@ -28535,7 +28550,7 @@
               <a:t> </a:t>
             </a:r>
             <a:r>
-              <a:rPr lang="en-US" sz="2400" err="1">
+              <a:rPr lang="en-US" sz="2400" dirty="0" err="1">
                 <a:solidFill>
                   <a:srgbClr val="000000"/>
                 </a:solidFill>
@@ -28544,7 +28559,7 @@
               <a:t>analüüsi</a:t>
             </a:r>
             <a:r>
-              <a:rPr lang="en-US" sz="2400">
+              <a:rPr lang="en-US" sz="2400" dirty="0">
                 <a:solidFill>
                   <a:srgbClr val="000000"/>
                 </a:solidFill>
@@ -28553,7 +28568,7 @@
               <a:t> </a:t>
             </a:r>
             <a:r>
-              <a:rPr lang="en-US" sz="2400" err="1">
+              <a:rPr lang="en-US" sz="2400" dirty="0" err="1">
                 <a:solidFill>
                   <a:srgbClr val="000000"/>
                 </a:solidFill>
@@ -28562,7 +28577,7 @@
               <a:t>teistega</a:t>
             </a:r>
             <a:r>
-              <a:rPr lang="en-US" sz="2400">
+              <a:rPr lang="en-US" sz="2400" dirty="0">
                 <a:solidFill>
                   <a:srgbClr val="000000"/>
                 </a:solidFill>
@@ -28571,7 +28586,7 @@
               <a:t> </a:t>
             </a:r>
             <a:r>
-              <a:rPr lang="en-US" sz="2400" err="1">
+              <a:rPr lang="en-US" sz="2400" dirty="0" err="1">
                 <a:solidFill>
                   <a:srgbClr val="000000"/>
                 </a:solidFill>
@@ -28580,7 +28595,7 @@
               <a:t>jagada</a:t>
             </a:r>
             <a:r>
-              <a:rPr lang="en-US" sz="2400">
+              <a:rPr lang="en-US" sz="2400" dirty="0">
                 <a:solidFill>
                   <a:srgbClr val="000000"/>
                 </a:solidFill>
@@ -28588,7 +28603,68 @@
               </a:rPr>
               <a:t>?</a:t>
             </a:r>
-            <a:endParaRPr lang="en-US" sz="2400">
+          </a:p>
+          <a:p>
+            <a:pPr>
+              <a:lnSpc>
+                <a:spcPct val="150000"/>
+              </a:lnSpc>
+            </a:pPr>
+            <a:r>
+              <a:rPr lang="en-US" sz="2400" dirty="0" err="1">
+                <a:solidFill>
+                  <a:srgbClr val="000000"/>
+                </a:solidFill>
+                <a:ea typeface="Inter"/>
+              </a:rPr>
+              <a:t>Kuidas</a:t>
+            </a:r>
+            <a:r>
+              <a:rPr lang="en-US" sz="2400" dirty="0">
+                <a:solidFill>
+                  <a:srgbClr val="000000"/>
+                </a:solidFill>
+                <a:ea typeface="Inter"/>
+              </a:rPr>
+              <a:t> </a:t>
+            </a:r>
+            <a:r>
+              <a:rPr lang="en-US" sz="2400" dirty="0" err="1">
+                <a:solidFill>
+                  <a:srgbClr val="000000"/>
+                </a:solidFill>
+                <a:ea typeface="Inter"/>
+              </a:rPr>
+              <a:t>tõsta</a:t>
+            </a:r>
+            <a:r>
+              <a:rPr lang="en-US" sz="2400" dirty="0">
+                <a:solidFill>
+                  <a:srgbClr val="000000"/>
+                </a:solidFill>
+                <a:ea typeface="Inter"/>
+              </a:rPr>
+              <a:t> </a:t>
+            </a:r>
+            <a:r>
+              <a:rPr lang="en-US" sz="2400" dirty="0" err="1">
+                <a:solidFill>
+                  <a:srgbClr val="000000"/>
+                </a:solidFill>
+                <a:ea typeface="Inter"/>
+              </a:rPr>
+              <a:t>kasumlikkust</a:t>
+            </a:r>
+            <a:r>
+              <a:rPr lang="en-US" sz="2400" dirty="0">
+                <a:solidFill>
+                  <a:srgbClr val="000000"/>
+                </a:solidFill>
+                <a:ea typeface="Inter"/>
+              </a:rPr>
+              <a:t>?</a:t>
+            </a:r>
+            <a:endParaRPr lang="en-US" sz="2400" dirty="0">
               <a:solidFill>
                 <a:srgbClr val="000000"/>
               </a:solidFill>
@@ -28601,7 +28677,7 @@
               </a:lnSpc>
               <a:buNone/>
             </a:pPr>
-            <a:endParaRPr lang="en-US" sz="2400">
+            <a:endParaRPr lang="en-US" sz="2400" dirty="0">
               <a:solidFill>
                 <a:srgbClr val="000000"/>
               </a:solidFill>
@@ -28614,7 +28690,7 @@
                 <a:spcPct val="150000"/>
               </a:lnSpc>
             </a:pPr>
-            <a:endParaRPr lang="en-US" sz="2400">
+            <a:endParaRPr lang="en-US" sz="2400" dirty="0">
               <a:solidFill>
                 <a:srgbClr val="000000"/>
               </a:solidFill>
@@ -33311,18 +33387,18 @@
 </file>
 
 <file path=customXml/item1.xml><?xml version="1.0" encoding="utf-8"?>
+<p:properties xmlns:p="http://schemas.microsoft.com/office/2006/metadata/properties" xmlns:xsi="http://www.w3.org/2001/XMLSchema-instance" xmlns:pc="http://schemas.microsoft.com/office/infopath/2007/PartnerControls">
+  <documentManagement/>
+</p:properties>
+</file>
+
+<file path=customXml/item2.xml><?xml version="1.0" encoding="utf-8"?>
 <?mso-contentType ?>
 <FormTemplates xmlns="http://schemas.microsoft.com/sharepoint/v3/contenttype/forms">
   <Display>DocumentLibraryForm</Display>
   <Edit>DocumentLibraryForm</Edit>
   <New>DocumentLibraryForm</New>
 </FormTemplates>
-</file>
-
-<file path=customXml/item2.xml><?xml version="1.0" encoding="utf-8"?>
-<p:properties xmlns:p="http://schemas.microsoft.com/office/2006/metadata/properties" xmlns:xsi="http://www.w3.org/2001/XMLSchema-instance" xmlns:pc="http://schemas.microsoft.com/office/infopath/2007/PartnerControls">
-  <documentManagement/>
-</p:properties>
 </file>
 
 <file path=customXml/item3.xml><?xml version="1.0" encoding="utf-8"?>
@@ -33494,18 +33570,18 @@
 </file>
 
 <file path=customXml/itemProps1.xml><?xml version="1.0" encoding="utf-8"?>
-<ds:datastoreItem xmlns:ds="http://schemas.openxmlformats.org/officeDocument/2006/customXml" ds:itemID="{9DC439CA-6F1C-4005-ACA6-A52E04DEE0A7}">
+<ds:datastoreItem xmlns:ds="http://schemas.openxmlformats.org/officeDocument/2006/customXml" ds:itemID="{5BDF4908-A52A-47DD-A794-6E02D71942FC}">
   <ds:schemaRefs>
-    <ds:schemaRef ds:uri="http://schemas.microsoft.com/sharepoint/v3/contenttype/forms"/>
+    <ds:schemaRef ds:uri="http://schemas.microsoft.com/office/2006/metadata/properties"/>
+    <ds:schemaRef ds:uri="http://schemas.microsoft.com/office/infopath/2007/PartnerControls"/>
   </ds:schemaRefs>
 </ds:datastoreItem>
 </file>
 
 <file path=customXml/itemProps2.xml><?xml version="1.0" encoding="utf-8"?>
-<ds:datastoreItem xmlns:ds="http://schemas.openxmlformats.org/officeDocument/2006/customXml" ds:itemID="{5BDF4908-A52A-47DD-A794-6E02D71942FC}">
+<ds:datastoreItem xmlns:ds="http://schemas.openxmlformats.org/officeDocument/2006/customXml" ds:itemID="{9DC439CA-6F1C-4005-ACA6-A52E04DEE0A7}">
   <ds:schemaRefs>
-    <ds:schemaRef ds:uri="http://schemas.microsoft.com/office/2006/metadata/properties"/>
-    <ds:schemaRef ds:uri="http://schemas.microsoft.com/office/infopath/2007/PartnerControls"/>
+    <ds:schemaRef ds:uri="http://schemas.microsoft.com/sharepoint/v3/contenttype/forms"/>
   </ds:schemaRefs>
 </ds:datastoreItem>
 </file>
